--- a/make_presentation/templates/templates/flow/no_logo_7.pptx
+++ b/make_presentation/templates/templates/flow/no_logo_7.pptx
@@ -66,20 +66,17 @@
             <a:noAutofit/>
           </a:bodyPr>
           <a:p>
-            <a:r>
-              <a:rPr b="0" lang="en-US" sz="1800" spc="-1" strike="noStrike">
-                <a:solidFill>
-                  <a:srgbClr val="000000"/>
-                </a:solidFill>
-                <a:latin typeface="Calibri"/>
-              </a:rPr>
-              <a:t>Для перемещения страницы щёлкните мышью</a:t>
-            </a:r>
-            <a:endParaRPr b="0" lang="en-US" sz="1800" spc="-1" strike="noStrike">
-              <a:solidFill>
-                <a:srgbClr val="000000"/>
-              </a:solidFill>
-              <a:latin typeface="Calibri"/>
+            <a:pPr algn="ctr">
+              <a:buNone/>
+            </a:pPr>
+            <a:r>
+              <a:rPr b="0" lang="en-US" sz="4400" spc="-1" strike="noStrike">
+                <a:latin typeface="Arial"/>
+              </a:rPr>
+              <a:t>Click to move the slide</a:t>
+            </a:r>
+            <a:endParaRPr b="0" lang="en-US" sz="4400" spc="-1" strike="noStrike">
+              <a:latin typeface="Arial"/>
             </a:endParaRPr>
           </a:p>
         </p:txBody>
@@ -113,12 +110,12 @@
           </a:bodyPr>
           <a:p>
             <a:r>
-              <a:rPr b="0" lang="ru-RU" sz="2000" spc="-1" strike="noStrike">
+              <a:rPr b="0" lang="en-US" sz="2000" spc="-1" strike="noStrike">
                 <a:latin typeface="Arial"/>
               </a:rPr>
-              <a:t>Для правки формата примечаний щёлкните мышью</a:t>
-            </a:r>
-            <a:endParaRPr b="0" lang="ru-RU" sz="2000" spc="-1" strike="noStrike">
+              <a:t>Click to edit the notes format</a:t>
+            </a:r>
+            <a:endParaRPr b="0" lang="en-US" sz="2000" spc="-1" strike="noStrike">
               <a:latin typeface="Arial"/>
             </a:endParaRPr>
           </a:p>
@@ -153,12 +150,12 @@
           </a:bodyPr>
           <a:p>
             <a:r>
-              <a:rPr b="0" lang="ru-RU" sz="1400" spc="-1" strike="noStrike">
+              <a:rPr b="0" lang="en-US" sz="1400" spc="-1" strike="noStrike">
                 <a:latin typeface="Times New Roman"/>
               </a:rPr>
-              <a:t>&lt;верхний колонтитул&gt;</a:t>
-            </a:r>
-            <a:endParaRPr b="0" lang="ru-RU" sz="1400" spc="-1" strike="noStrike">
+              <a:t>&lt;header&gt;</a:t>
+            </a:r>
+            <a:endParaRPr b="0" lang="en-US" sz="1400" spc="-1" strike="noStrike">
               <a:latin typeface="Times New Roman"/>
             </a:endParaRPr>
           </a:p>
@@ -194,7 +191,7 @@
           <a:lstStyle>
             <a:lvl1pPr algn="r">
               <a:buNone/>
-              <a:defRPr b="0" lang="ru-RU" sz="1400" spc="-1" strike="noStrike">
+              <a:defRPr b="0" lang="en-US" sz="1400" spc="-1" strike="noStrike">
                 <a:latin typeface="Times New Roman"/>
               </a:defRPr>
             </a:lvl1pPr>
@@ -204,12 +201,12 @@
               <a:buNone/>
             </a:pPr>
             <a:r>
-              <a:rPr b="0" lang="ru-RU" sz="1400" spc="-1" strike="noStrike">
+              <a:rPr b="0" lang="en-US" sz="1400" spc="-1" strike="noStrike">
                 <a:latin typeface="Times New Roman"/>
               </a:rPr>
-              <a:t>&lt;дата/время&gt;</a:t>
-            </a:r>
-            <a:endParaRPr b="0" lang="ru-RU" sz="1400" spc="-1" strike="noStrike">
+              <a:t>&lt;date/time&gt;</a:t>
+            </a:r>
+            <a:endParaRPr b="0" lang="en-US" sz="1400" spc="-1" strike="noStrike">
               <a:latin typeface="Times New Roman"/>
             </a:endParaRPr>
           </a:p>
@@ -244,19 +241,19 @@
           </a:bodyPr>
           <a:lstStyle>
             <a:lvl1pPr>
-              <a:defRPr b="0" lang="ru-RU" sz="1400" spc="-1" strike="noStrike">
+              <a:defRPr b="0" lang="en-US" sz="1400" spc="-1" strike="noStrike">
                 <a:latin typeface="Times New Roman"/>
               </a:defRPr>
             </a:lvl1pPr>
           </a:lstStyle>
           <a:p>
             <a:r>
-              <a:rPr b="0" lang="ru-RU" sz="1400" spc="-1" strike="noStrike">
+              <a:rPr b="0" lang="en-US" sz="1400" spc="-1" strike="noStrike">
                 <a:latin typeface="Times New Roman"/>
               </a:rPr>
-              <a:t>&lt;нижний колонтитул&gt;</a:t>
-            </a:r>
-            <a:endParaRPr b="0" lang="ru-RU" sz="1400" spc="-1" strike="noStrike">
+              <a:t>&lt;footer&gt;</a:t>
+            </a:r>
+            <a:endParaRPr b="0" lang="en-US" sz="1400" spc="-1" strike="noStrike">
               <a:latin typeface="Times New Roman"/>
             </a:endParaRPr>
           </a:p>
@@ -292,7 +289,7 @@
           <a:lstStyle>
             <a:lvl1pPr algn="r">
               <a:buNone/>
-              <a:defRPr b="0" lang="ru-RU" sz="1400" spc="-1" strike="noStrike">
+              <a:defRPr b="0" lang="en-US" sz="1400" spc="-1" strike="noStrike">
                 <a:latin typeface="Times New Roman"/>
               </a:defRPr>
             </a:lvl1pPr>
@@ -301,13 +298,13 @@
             <a:pPr algn="r">
               <a:buNone/>
             </a:pPr>
-            <a:fld id="{03D4F3F3-17B9-4A59-A637-DCD744006E26}" type="slidenum">
-              <a:rPr b="0" lang="ru-RU" sz="1400" spc="-1" strike="noStrike">
+            <a:fld id="{4F142243-E8F1-4C65-9FF2-118FACBE5624}" type="slidenum">
+              <a:rPr b="0" lang="en-US" sz="1400" spc="-1" strike="noStrike">
                 <a:latin typeface="Times New Roman"/>
               </a:rPr>
-              <a:t>&lt;номер&gt;</a:t>
+              <a:t>&lt;number&gt;</a:t>
             </a:fld>
-            <a:endParaRPr b="0" lang="ru-RU" sz="1400" spc="-1" strike="noStrike">
+            <a:endParaRPr b="0" lang="en-US" sz="1400" spc="-1" strike="noStrike">
               <a:latin typeface="Times New Roman"/>
             </a:endParaRPr>
           </a:p>
@@ -338,7 +335,7 @@
       </p:grpSpPr>
       <p:sp>
         <p:nvSpPr>
-          <p:cNvPr id="107" name="PlaceHolder 1"/>
+          <p:cNvPr id="106" name="PlaceHolder 1"/>
           <p:cNvSpPr>
             <a:spLocks noGrp="1"/>
           </p:cNvSpPr>
@@ -349,19 +346,19 @@
         <p:spPr>
           <a:xfrm>
             <a:off x="685800" y="1143000"/>
-            <a:ext cx="5486040" cy="3085920"/>
-          </a:xfrm>
-          <a:prstGeom prst="rect">
-            <a:avLst/>
-          </a:prstGeom>
-          <a:ln w="0">
-            <a:noFill/>
-          </a:ln>
-        </p:spPr>
-      </p:sp>
-      <p:sp>
-        <p:nvSpPr>
-          <p:cNvPr id="108" name="PlaceHolder 2"/>
+            <a:ext cx="5485680" cy="3085560"/>
+          </a:xfrm>
+          <a:prstGeom prst="rect">
+            <a:avLst/>
+          </a:prstGeom>
+          <a:ln w="0">
+            <a:noFill/>
+          </a:ln>
+        </p:spPr>
+      </p:sp>
+      <p:sp>
+        <p:nvSpPr>
+          <p:cNvPr id="107" name="PlaceHolder 2"/>
           <p:cNvSpPr>
             <a:spLocks noGrp="1"/>
           </p:cNvSpPr>
@@ -372,30 +369,30 @@
         <p:spPr>
           <a:xfrm>
             <a:off x="685800" y="4400640"/>
-            <a:ext cx="5486040" cy="3600000"/>
-          </a:xfrm>
-          <a:prstGeom prst="rect">
-            <a:avLst/>
-          </a:prstGeom>
-          <a:noFill/>
-          <a:ln w="0">
-            <a:noFill/>
-          </a:ln>
-        </p:spPr>
-        <p:txBody>
-          <a:bodyPr anchor="t">
-            <a:noAutofit/>
-          </a:bodyPr>
-          <a:p>
-            <a:endParaRPr b="0" lang="ru-RU" sz="2000" spc="-1" strike="noStrike">
-              <a:latin typeface="Arial"/>
-            </a:endParaRPr>
-          </a:p>
-        </p:txBody>
-      </p:sp>
-      <p:sp>
-        <p:nvSpPr>
-          <p:cNvPr id="109" name="PlaceHolder 3"/>
+            <a:ext cx="5485680" cy="3599640"/>
+          </a:xfrm>
+          <a:prstGeom prst="rect">
+            <a:avLst/>
+          </a:prstGeom>
+          <a:noFill/>
+          <a:ln w="0">
+            <a:noFill/>
+          </a:ln>
+        </p:spPr>
+        <p:txBody>
+          <a:bodyPr lIns="0" rIns="0" tIns="0" bIns="0" anchor="t">
+            <a:noAutofit/>
+          </a:bodyPr>
+          <a:p>
+            <a:endParaRPr b="0" lang="en-US" sz="2000" spc="-1" strike="noStrike">
+              <a:latin typeface="Arial"/>
+            </a:endParaRPr>
+          </a:p>
+        </p:txBody>
+      </p:sp>
+      <p:sp>
+        <p:nvSpPr>
+          <p:cNvPr id="108" name="PlaceHolder 3"/>
           <p:cNvSpPr>
             <a:spLocks noGrp="1"/>
           </p:cNvSpPr>
@@ -406,18 +403,18 @@
         <p:spPr>
           <a:xfrm>
             <a:off x="3884760" y="8685360"/>
-            <a:ext cx="2971440" cy="458280"/>
-          </a:xfrm>
-          <a:prstGeom prst="rect">
-            <a:avLst/>
-          </a:prstGeom>
-          <a:noFill/>
-          <a:ln w="0">
-            <a:noFill/>
-          </a:ln>
-        </p:spPr>
-        <p:txBody>
-          <a:bodyPr anchor="b">
+            <a:ext cx="2971080" cy="457920"/>
+          </a:xfrm>
+          <a:prstGeom prst="rect">
+            <a:avLst/>
+          </a:prstGeom>
+          <a:noFill/>
+          <a:ln w="0">
+            <a:noFill/>
+          </a:ln>
+        </p:spPr>
+        <p:txBody>
+          <a:bodyPr lIns="0" rIns="0" tIns="0" bIns="0" anchor="b">
             <a:noAutofit/>
           </a:bodyPr>
           <a:lstStyle>
@@ -438,13 +435,13 @@
               </a:lnSpc>
               <a:buNone/>
             </a:pPr>
-            <a:fld id="{75CB4178-77B3-4D26-A4F7-F3F74DD1CC2E}" type="slidenum">
+            <a:fld id="{82F666C1-31AF-44C6-8294-4E5F736C55A6}" type="slidenum">
               <a:rPr b="0" lang="ru-RU" sz="1200" spc="-1" strike="noStrike">
                 <a:latin typeface="Times New Roman"/>
               </a:rPr>
-              <a:t>&lt;номер&gt;</a:t>
+              <a:t>&lt;number&gt;</a:t>
             </a:fld>
-            <a:endParaRPr b="0" lang="ru-RU" sz="1200" spc="-1" strike="noStrike">
+            <a:endParaRPr b="0" lang="en-US" sz="1200" spc="-1" strike="noStrike">
               <a:latin typeface="Times New Roman"/>
             </a:endParaRPr>
           </a:p>
@@ -474,7 +471,7 @@
       </p:grpSpPr>
       <p:sp>
         <p:nvSpPr>
-          <p:cNvPr id="110" name="PlaceHolder 1"/>
+          <p:cNvPr id="109" name="PlaceHolder 1"/>
           <p:cNvSpPr>
             <a:spLocks noGrp="1"/>
           </p:cNvSpPr>
@@ -485,19 +482,19 @@
         <p:spPr>
           <a:xfrm>
             <a:off x="685800" y="1143000"/>
-            <a:ext cx="5486040" cy="3085920"/>
-          </a:xfrm>
-          <a:prstGeom prst="rect">
-            <a:avLst/>
-          </a:prstGeom>
-          <a:ln w="0">
-            <a:noFill/>
-          </a:ln>
-        </p:spPr>
-      </p:sp>
-      <p:sp>
-        <p:nvSpPr>
-          <p:cNvPr id="111" name="PlaceHolder 2"/>
+            <a:ext cx="5485680" cy="3085560"/>
+          </a:xfrm>
+          <a:prstGeom prst="rect">
+            <a:avLst/>
+          </a:prstGeom>
+          <a:ln w="0">
+            <a:noFill/>
+          </a:ln>
+        </p:spPr>
+      </p:sp>
+      <p:sp>
+        <p:nvSpPr>
+          <p:cNvPr id="110" name="PlaceHolder 2"/>
           <p:cNvSpPr>
             <a:spLocks noGrp="1"/>
           </p:cNvSpPr>
@@ -508,30 +505,30 @@
         <p:spPr>
           <a:xfrm>
             <a:off x="685800" y="4400640"/>
-            <a:ext cx="5486040" cy="3600000"/>
-          </a:xfrm>
-          <a:prstGeom prst="rect">
-            <a:avLst/>
-          </a:prstGeom>
-          <a:noFill/>
-          <a:ln w="0">
-            <a:noFill/>
-          </a:ln>
-        </p:spPr>
-        <p:txBody>
-          <a:bodyPr anchor="t">
-            <a:noAutofit/>
-          </a:bodyPr>
-          <a:p>
-            <a:endParaRPr b="0" lang="ru-RU" sz="2000" spc="-1" strike="noStrike">
-              <a:latin typeface="Arial"/>
-            </a:endParaRPr>
-          </a:p>
-        </p:txBody>
-      </p:sp>
-      <p:sp>
-        <p:nvSpPr>
-          <p:cNvPr id="112" name="PlaceHolder 3"/>
+            <a:ext cx="5485680" cy="3599640"/>
+          </a:xfrm>
+          <a:prstGeom prst="rect">
+            <a:avLst/>
+          </a:prstGeom>
+          <a:noFill/>
+          <a:ln w="0">
+            <a:noFill/>
+          </a:ln>
+        </p:spPr>
+        <p:txBody>
+          <a:bodyPr lIns="0" rIns="0" tIns="0" bIns="0" anchor="t">
+            <a:noAutofit/>
+          </a:bodyPr>
+          <a:p>
+            <a:endParaRPr b="0" lang="en-US" sz="2000" spc="-1" strike="noStrike">
+              <a:latin typeface="Arial"/>
+            </a:endParaRPr>
+          </a:p>
+        </p:txBody>
+      </p:sp>
+      <p:sp>
+        <p:nvSpPr>
+          <p:cNvPr id="111" name="PlaceHolder 3"/>
           <p:cNvSpPr>
             <a:spLocks noGrp="1"/>
           </p:cNvSpPr>
@@ -542,18 +539,18 @@
         <p:spPr>
           <a:xfrm>
             <a:off x="3884760" y="8685360"/>
-            <a:ext cx="2971440" cy="458280"/>
-          </a:xfrm>
-          <a:prstGeom prst="rect">
-            <a:avLst/>
-          </a:prstGeom>
-          <a:noFill/>
-          <a:ln w="0">
-            <a:noFill/>
-          </a:ln>
-        </p:spPr>
-        <p:txBody>
-          <a:bodyPr anchor="b">
+            <a:ext cx="2971080" cy="457920"/>
+          </a:xfrm>
+          <a:prstGeom prst="rect">
+            <a:avLst/>
+          </a:prstGeom>
+          <a:noFill/>
+          <a:ln w="0">
+            <a:noFill/>
+          </a:ln>
+        </p:spPr>
+        <p:txBody>
+          <a:bodyPr lIns="0" rIns="0" tIns="0" bIns="0" anchor="b">
             <a:noAutofit/>
           </a:bodyPr>
           <a:lstStyle>
@@ -574,13 +571,13 @@
               </a:lnSpc>
               <a:buNone/>
             </a:pPr>
-            <a:fld id="{EB96A4C0-D3E9-4502-A128-61D736F570DD}" type="slidenum">
+            <a:fld id="{9D9A38B9-A234-43D2-AF1E-5BD1FA4C17ED}" type="slidenum">
               <a:rPr b="0" lang="ru-RU" sz="1200" spc="-1" strike="noStrike">
                 <a:latin typeface="Times New Roman"/>
               </a:rPr>
-              <a:t>&lt;номер&gt;</a:t>
+              <a:t>&lt;number&gt;</a:t>
             </a:fld>
-            <a:endParaRPr b="0" lang="ru-RU" sz="1200" spc="-1" strike="noStrike">
+            <a:endParaRPr b="0" lang="en-US" sz="1200" spc="-1" strike="noStrike">
               <a:latin typeface="Times New Roman"/>
             </a:endParaRPr>
           </a:p>
@@ -615,7 +612,7 @@
             <a:spLocks noGrp="1"/>
           </p:cNvSpPr>
           <p:nvPr>
-            <p:ph type="ftr" idx="2"/>
+            <p:ph type="ftr" idx="1"/>
           </p:nvPr>
         </p:nvSpPr>
         <p:spPr/>
@@ -635,14 +632,14 @@
             <a:spLocks noGrp="1"/>
           </p:cNvSpPr>
           <p:nvPr>
-            <p:ph type="sldNum" idx="3"/>
+            <p:ph type="sldNum" idx="2"/>
           </p:nvPr>
         </p:nvSpPr>
         <p:spPr/>
         <p:txBody>
           <a:bodyPr/>
           <a:p>
-            <a:fld id="{8C3FA8FC-D8D9-463E-B734-46B84FF56711}" type="slidenum">
+            <a:fld id="{0B29BA0B-FAE4-4568-BFDE-59395F38B5F0}" type="slidenum">
               <a:t>&lt;#&gt;</a:t>
             </a:fld>
           </a:p>
@@ -655,7 +652,7 @@
             <a:spLocks noGrp="1"/>
           </p:cNvSpPr>
           <p:nvPr>
-            <p:ph type="dt" idx="1"/>
+            <p:ph type="dt" idx="3"/>
           </p:nvPr>
         </p:nvSpPr>
         <p:spPr/>
@@ -663,7 +660,7 @@
           <a:bodyPr/>
           <a:p>
             <a:r>
-              <a:rPr lang="ru-RU"/>
+              <a:rPr lang="en-US"/>
               <a:t/>
             </a:r>
           </a:p>
@@ -704,7 +701,7 @@
         <p:spPr>
           <a:xfrm>
             <a:off x="1143000" y="841680"/>
-            <a:ext cx="6857640" cy="1790280"/>
+            <a:ext cx="6857280" cy="1789920"/>
           </a:xfrm>
           <a:prstGeom prst="rect">
             <a:avLst/>
@@ -719,11 +716,11 @@
             <a:noAutofit/>
           </a:bodyPr>
           <a:p>
-            <a:endParaRPr b="0" lang="en-US" sz="1800" spc="-1" strike="noStrike">
-              <a:solidFill>
-                <a:srgbClr val="000000"/>
-              </a:solidFill>
-              <a:latin typeface="Calibri"/>
+            <a:pPr algn="ctr">
+              <a:buNone/>
+            </a:pPr>
+            <a:endParaRPr b="0" lang="en-US" sz="4400" spc="-1" strike="noStrike">
+              <a:latin typeface="Arial"/>
             </a:endParaRPr>
           </a:p>
         </p:txBody>
@@ -756,20 +753,8 @@
             <a:normAutofit/>
           </a:bodyPr>
           <a:p>
-            <a:pPr>
-              <a:lnSpc>
-                <a:spcPct val="90000"/>
-              </a:lnSpc>
-              <a:spcBef>
-                <a:spcPts val="1417"/>
-              </a:spcBef>
-              <a:buNone/>
-            </a:pPr>
-            <a:endParaRPr b="0" lang="en-US" sz="2100" spc="-1" strike="noStrike">
-              <a:solidFill>
-                <a:srgbClr val="000000"/>
-              </a:solidFill>
-              <a:latin typeface="Calibri"/>
+            <a:endParaRPr b="0" lang="en-US" sz="3200" spc="-1" strike="noStrike">
+              <a:latin typeface="Arial"/>
             </a:endParaRPr>
           </a:p>
         </p:txBody>
@@ -802,20 +787,8 @@
             <a:normAutofit/>
           </a:bodyPr>
           <a:p>
-            <a:pPr>
-              <a:lnSpc>
-                <a:spcPct val="90000"/>
-              </a:lnSpc>
-              <a:spcBef>
-                <a:spcPts val="1417"/>
-              </a:spcBef>
-              <a:buNone/>
-            </a:pPr>
-            <a:endParaRPr b="0" lang="en-US" sz="2100" spc="-1" strike="noStrike">
-              <a:solidFill>
-                <a:srgbClr val="000000"/>
-              </a:solidFill>
-              <a:latin typeface="Calibri"/>
+            <a:endParaRPr b="0" lang="en-US" sz="3200" spc="-1" strike="noStrike">
+              <a:latin typeface="Arial"/>
             </a:endParaRPr>
           </a:p>
         </p:txBody>
@@ -827,7 +800,7 @@
             <a:spLocks noGrp="1"/>
           </p:cNvSpPr>
           <p:nvPr>
-            <p:ph type="ftr" idx="2"/>
+            <p:ph type="ftr" idx="1"/>
           </p:nvPr>
         </p:nvSpPr>
         <p:spPr/>
@@ -847,14 +820,14 @@
             <a:spLocks noGrp="1"/>
           </p:cNvSpPr>
           <p:nvPr>
-            <p:ph type="sldNum" idx="3"/>
+            <p:ph type="sldNum" idx="2"/>
           </p:nvPr>
         </p:nvSpPr>
         <p:spPr/>
         <p:txBody>
           <a:bodyPr/>
           <a:p>
-            <a:fld id="{52862A84-E461-44E8-813B-8AD19E8F1154}" type="slidenum">
+            <a:fld id="{F5E4388F-8DDF-429C-BCE8-F928D189FBF0}" type="slidenum">
               <a:t>&lt;#&gt;</a:t>
             </a:fld>
           </a:p>
@@ -867,7 +840,7 @@
             <a:spLocks noGrp="1"/>
           </p:cNvSpPr>
           <p:nvPr>
-            <p:ph type="dt" idx="1"/>
+            <p:ph type="dt" idx="3"/>
           </p:nvPr>
         </p:nvSpPr>
         <p:spPr/>
@@ -875,7 +848,7 @@
           <a:bodyPr/>
           <a:p>
             <a:r>
-              <a:rPr lang="ru-RU"/>
+              <a:rPr lang="en-US"/>
               <a:t/>
             </a:r>
           </a:p>
@@ -916,7 +889,7 @@
         <p:spPr>
           <a:xfrm>
             <a:off x="1143000" y="841680"/>
-            <a:ext cx="6857640" cy="1790280"/>
+            <a:ext cx="6857280" cy="1789920"/>
           </a:xfrm>
           <a:prstGeom prst="rect">
             <a:avLst/>
@@ -931,11 +904,11 @@
             <a:noAutofit/>
           </a:bodyPr>
           <a:p>
-            <a:endParaRPr b="0" lang="en-US" sz="1800" spc="-1" strike="noStrike">
-              <a:solidFill>
-                <a:srgbClr val="000000"/>
-              </a:solidFill>
-              <a:latin typeface="Calibri"/>
+            <a:pPr algn="ctr">
+              <a:buNone/>
+            </a:pPr>
+            <a:endParaRPr b="0" lang="en-US" sz="4400" spc="-1" strike="noStrike">
+              <a:latin typeface="Arial"/>
             </a:endParaRPr>
           </a:p>
         </p:txBody>
@@ -968,20 +941,8 @@
             <a:normAutofit/>
           </a:bodyPr>
           <a:p>
-            <a:pPr>
-              <a:lnSpc>
-                <a:spcPct val="90000"/>
-              </a:lnSpc>
-              <a:spcBef>
-                <a:spcPts val="1417"/>
-              </a:spcBef>
-              <a:buNone/>
-            </a:pPr>
-            <a:endParaRPr b="0" lang="en-US" sz="2100" spc="-1" strike="noStrike">
-              <a:solidFill>
-                <a:srgbClr val="000000"/>
-              </a:solidFill>
-              <a:latin typeface="Calibri"/>
+            <a:endParaRPr b="0" lang="en-US" sz="3200" spc="-1" strike="noStrike">
+              <a:latin typeface="Arial"/>
             </a:endParaRPr>
           </a:p>
         </p:txBody>
@@ -1014,20 +975,8 @@
             <a:normAutofit/>
           </a:bodyPr>
           <a:p>
-            <a:pPr>
-              <a:lnSpc>
-                <a:spcPct val="90000"/>
-              </a:lnSpc>
-              <a:spcBef>
-                <a:spcPts val="1417"/>
-              </a:spcBef>
-              <a:buNone/>
-            </a:pPr>
-            <a:endParaRPr b="0" lang="en-US" sz="2100" spc="-1" strike="noStrike">
-              <a:solidFill>
-                <a:srgbClr val="000000"/>
-              </a:solidFill>
-              <a:latin typeface="Calibri"/>
+            <a:endParaRPr b="0" lang="en-US" sz="3200" spc="-1" strike="noStrike">
+              <a:latin typeface="Arial"/>
             </a:endParaRPr>
           </a:p>
         </p:txBody>
@@ -1060,20 +1009,8 @@
             <a:normAutofit/>
           </a:bodyPr>
           <a:p>
-            <a:pPr>
-              <a:lnSpc>
-                <a:spcPct val="90000"/>
-              </a:lnSpc>
-              <a:spcBef>
-                <a:spcPts val="1417"/>
-              </a:spcBef>
-              <a:buNone/>
-            </a:pPr>
-            <a:endParaRPr b="0" lang="en-US" sz="2100" spc="-1" strike="noStrike">
-              <a:solidFill>
-                <a:srgbClr val="000000"/>
-              </a:solidFill>
-              <a:latin typeface="Calibri"/>
+            <a:endParaRPr b="0" lang="en-US" sz="3200" spc="-1" strike="noStrike">
+              <a:latin typeface="Arial"/>
             </a:endParaRPr>
           </a:p>
         </p:txBody>
@@ -1106,20 +1043,8 @@
             <a:normAutofit/>
           </a:bodyPr>
           <a:p>
-            <a:pPr>
-              <a:lnSpc>
-                <a:spcPct val="90000"/>
-              </a:lnSpc>
-              <a:spcBef>
-                <a:spcPts val="1417"/>
-              </a:spcBef>
-              <a:buNone/>
-            </a:pPr>
-            <a:endParaRPr b="0" lang="en-US" sz="2100" spc="-1" strike="noStrike">
-              <a:solidFill>
-                <a:srgbClr val="000000"/>
-              </a:solidFill>
-              <a:latin typeface="Calibri"/>
+            <a:endParaRPr b="0" lang="en-US" sz="3200" spc="-1" strike="noStrike">
+              <a:latin typeface="Arial"/>
             </a:endParaRPr>
           </a:p>
         </p:txBody>
@@ -1131,7 +1056,7 @@
             <a:spLocks noGrp="1"/>
           </p:cNvSpPr>
           <p:nvPr>
-            <p:ph type="ftr" idx="2"/>
+            <p:ph type="ftr" idx="1"/>
           </p:nvPr>
         </p:nvSpPr>
         <p:spPr/>
@@ -1151,14 +1076,14 @@
             <a:spLocks noGrp="1"/>
           </p:cNvSpPr>
           <p:nvPr>
-            <p:ph type="sldNum" idx="3"/>
+            <p:ph type="sldNum" idx="2"/>
           </p:nvPr>
         </p:nvSpPr>
         <p:spPr/>
         <p:txBody>
           <a:bodyPr/>
           <a:p>
-            <a:fld id="{69199349-8BB2-4D00-8F4E-8DF62F4B043A}" type="slidenum">
+            <a:fld id="{C5F00493-E01B-44CF-BA87-D5C5D7321A3A}" type="slidenum">
               <a:t>&lt;#&gt;</a:t>
             </a:fld>
           </a:p>
@@ -1171,7 +1096,7 @@
             <a:spLocks noGrp="1"/>
           </p:cNvSpPr>
           <p:nvPr>
-            <p:ph type="dt" idx="1"/>
+            <p:ph type="dt" idx="3"/>
           </p:nvPr>
         </p:nvSpPr>
         <p:spPr/>
@@ -1179,7 +1104,7 @@
           <a:bodyPr/>
           <a:p>
             <a:r>
-              <a:rPr lang="ru-RU"/>
+              <a:rPr lang="en-US"/>
               <a:t/>
             </a:r>
           </a:p>
@@ -1220,7 +1145,7 @@
         <p:spPr>
           <a:xfrm>
             <a:off x="1143000" y="841680"/>
-            <a:ext cx="6857640" cy="1790280"/>
+            <a:ext cx="6857280" cy="1789920"/>
           </a:xfrm>
           <a:prstGeom prst="rect">
             <a:avLst/>
@@ -1235,11 +1160,11 @@
             <a:noAutofit/>
           </a:bodyPr>
           <a:p>
-            <a:endParaRPr b="0" lang="en-US" sz="1800" spc="-1" strike="noStrike">
-              <a:solidFill>
-                <a:srgbClr val="000000"/>
-              </a:solidFill>
-              <a:latin typeface="Calibri"/>
+            <a:pPr algn="ctr">
+              <a:buNone/>
+            </a:pPr>
+            <a:endParaRPr b="0" lang="en-US" sz="4400" spc="-1" strike="noStrike">
+              <a:latin typeface="Arial"/>
             </a:endParaRPr>
           </a:p>
         </p:txBody>
@@ -1272,20 +1197,8 @@
             <a:normAutofit/>
           </a:bodyPr>
           <a:p>
-            <a:pPr>
-              <a:lnSpc>
-                <a:spcPct val="90000"/>
-              </a:lnSpc>
-              <a:spcBef>
-                <a:spcPts val="1417"/>
-              </a:spcBef>
-              <a:buNone/>
-            </a:pPr>
-            <a:endParaRPr b="0" lang="en-US" sz="2100" spc="-1" strike="noStrike">
-              <a:solidFill>
-                <a:srgbClr val="000000"/>
-              </a:solidFill>
-              <a:latin typeface="Calibri"/>
+            <a:endParaRPr b="0" lang="en-US" sz="3200" spc="-1" strike="noStrike">
+              <a:latin typeface="Arial"/>
             </a:endParaRPr>
           </a:p>
         </p:txBody>
@@ -1318,20 +1231,8 @@
             <a:normAutofit/>
           </a:bodyPr>
           <a:p>
-            <a:pPr>
-              <a:lnSpc>
-                <a:spcPct val="90000"/>
-              </a:lnSpc>
-              <a:spcBef>
-                <a:spcPts val="1417"/>
-              </a:spcBef>
-              <a:buNone/>
-            </a:pPr>
-            <a:endParaRPr b="0" lang="en-US" sz="2100" spc="-1" strike="noStrike">
-              <a:solidFill>
-                <a:srgbClr val="000000"/>
-              </a:solidFill>
-              <a:latin typeface="Calibri"/>
+            <a:endParaRPr b="0" lang="en-US" sz="3200" spc="-1" strike="noStrike">
+              <a:latin typeface="Arial"/>
             </a:endParaRPr>
           </a:p>
         </p:txBody>
@@ -1364,20 +1265,8 @@
             <a:normAutofit/>
           </a:bodyPr>
           <a:p>
-            <a:pPr>
-              <a:lnSpc>
-                <a:spcPct val="90000"/>
-              </a:lnSpc>
-              <a:spcBef>
-                <a:spcPts val="1417"/>
-              </a:spcBef>
-              <a:buNone/>
-            </a:pPr>
-            <a:endParaRPr b="0" lang="en-US" sz="2100" spc="-1" strike="noStrike">
-              <a:solidFill>
-                <a:srgbClr val="000000"/>
-              </a:solidFill>
-              <a:latin typeface="Calibri"/>
+            <a:endParaRPr b="0" lang="en-US" sz="3200" spc="-1" strike="noStrike">
+              <a:latin typeface="Arial"/>
             </a:endParaRPr>
           </a:p>
         </p:txBody>
@@ -1410,20 +1299,8 @@
             <a:normAutofit/>
           </a:bodyPr>
           <a:p>
-            <a:pPr>
-              <a:lnSpc>
-                <a:spcPct val="90000"/>
-              </a:lnSpc>
-              <a:spcBef>
-                <a:spcPts val="1417"/>
-              </a:spcBef>
-              <a:buNone/>
-            </a:pPr>
-            <a:endParaRPr b="0" lang="en-US" sz="2100" spc="-1" strike="noStrike">
-              <a:solidFill>
-                <a:srgbClr val="000000"/>
-              </a:solidFill>
-              <a:latin typeface="Calibri"/>
+            <a:endParaRPr b="0" lang="en-US" sz="3200" spc="-1" strike="noStrike">
+              <a:latin typeface="Arial"/>
             </a:endParaRPr>
           </a:p>
         </p:txBody>
@@ -1456,20 +1333,8 @@
             <a:normAutofit/>
           </a:bodyPr>
           <a:p>
-            <a:pPr>
-              <a:lnSpc>
-                <a:spcPct val="90000"/>
-              </a:lnSpc>
-              <a:spcBef>
-                <a:spcPts val="1417"/>
-              </a:spcBef>
-              <a:buNone/>
-            </a:pPr>
-            <a:endParaRPr b="0" lang="en-US" sz="2100" spc="-1" strike="noStrike">
-              <a:solidFill>
-                <a:srgbClr val="000000"/>
-              </a:solidFill>
-              <a:latin typeface="Calibri"/>
+            <a:endParaRPr b="0" lang="en-US" sz="3200" spc="-1" strike="noStrike">
+              <a:latin typeface="Arial"/>
             </a:endParaRPr>
           </a:p>
         </p:txBody>
@@ -1502,20 +1367,8 @@
             <a:normAutofit/>
           </a:bodyPr>
           <a:p>
-            <a:pPr>
-              <a:lnSpc>
-                <a:spcPct val="90000"/>
-              </a:lnSpc>
-              <a:spcBef>
-                <a:spcPts val="1417"/>
-              </a:spcBef>
-              <a:buNone/>
-            </a:pPr>
-            <a:endParaRPr b="0" lang="en-US" sz="2100" spc="-1" strike="noStrike">
-              <a:solidFill>
-                <a:srgbClr val="000000"/>
-              </a:solidFill>
-              <a:latin typeface="Calibri"/>
+            <a:endParaRPr b="0" lang="en-US" sz="3200" spc="-1" strike="noStrike">
+              <a:latin typeface="Arial"/>
             </a:endParaRPr>
           </a:p>
         </p:txBody>
@@ -1527,7 +1380,7 @@
             <a:spLocks noGrp="1"/>
           </p:cNvSpPr>
           <p:nvPr>
-            <p:ph type="ftr" idx="2"/>
+            <p:ph type="ftr" idx="1"/>
           </p:nvPr>
         </p:nvSpPr>
         <p:spPr/>
@@ -1547,14 +1400,14 @@
             <a:spLocks noGrp="1"/>
           </p:cNvSpPr>
           <p:nvPr>
-            <p:ph type="sldNum" idx="3"/>
+            <p:ph type="sldNum" idx="2"/>
           </p:nvPr>
         </p:nvSpPr>
         <p:spPr/>
         <p:txBody>
           <a:bodyPr/>
           <a:p>
-            <a:fld id="{E64AA882-B0FD-4EA9-915A-95BCDF531580}" type="slidenum">
+            <a:fld id="{C47D256E-0C34-4F92-AF6A-4391A2A7BB91}" type="slidenum">
               <a:t>&lt;#&gt;</a:t>
             </a:fld>
           </a:p>
@@ -1567,7 +1420,7 @@
             <a:spLocks noGrp="1"/>
           </p:cNvSpPr>
           <p:nvPr>
-            <p:ph type="dt" idx="1"/>
+            <p:ph type="dt" idx="3"/>
           </p:nvPr>
         </p:nvSpPr>
         <p:spPr/>
@@ -1575,7 +1428,7 @@
           <a:bodyPr/>
           <a:p>
             <a:r>
-              <a:rPr lang="ru-RU"/>
+              <a:rPr lang="en-US"/>
               <a:t/>
             </a:r>
           </a:p>
@@ -1616,7 +1469,7 @@
         <p:spPr>
           <a:xfrm>
             <a:off x="1143000" y="841680"/>
-            <a:ext cx="6857640" cy="1790280"/>
+            <a:ext cx="6857280" cy="1789920"/>
           </a:xfrm>
           <a:prstGeom prst="rect">
             <a:avLst/>
@@ -1631,11 +1484,11 @@
             <a:noAutofit/>
           </a:bodyPr>
           <a:p>
-            <a:endParaRPr b="0" lang="en-US" sz="1800" spc="-1" strike="noStrike">
-              <a:solidFill>
-                <a:srgbClr val="000000"/>
-              </a:solidFill>
-              <a:latin typeface="Calibri"/>
+            <a:pPr algn="ctr">
+              <a:buNone/>
+            </a:pPr>
+            <a:endParaRPr b="0" lang="en-US" sz="4400" spc="-1" strike="noStrike">
+              <a:latin typeface="Arial"/>
             </a:endParaRPr>
           </a:p>
         </p:txBody>
@@ -1671,7 +1524,7 @@
             <a:pPr algn="ctr">
               <a:buNone/>
             </a:pPr>
-            <a:endParaRPr b="0" lang="ru-RU" sz="3200" spc="-1" strike="noStrike">
+            <a:endParaRPr b="0" lang="en-US" sz="3200" spc="-1" strike="noStrike">
               <a:latin typeface="Arial"/>
             </a:endParaRPr>
           </a:p>
@@ -1684,7 +1537,7 @@
             <a:spLocks noGrp="1"/>
           </p:cNvSpPr>
           <p:nvPr>
-            <p:ph type="ftr" idx="2"/>
+            <p:ph type="ftr" idx="1"/>
           </p:nvPr>
         </p:nvSpPr>
         <p:spPr/>
@@ -1704,14 +1557,14 @@
             <a:spLocks noGrp="1"/>
           </p:cNvSpPr>
           <p:nvPr>
-            <p:ph type="sldNum" idx="3"/>
+            <p:ph type="sldNum" idx="2"/>
           </p:nvPr>
         </p:nvSpPr>
         <p:spPr/>
         <p:txBody>
           <a:bodyPr/>
           <a:p>
-            <a:fld id="{912345B3-1660-4FF4-BE8C-C95155425693}" type="slidenum">
+            <a:fld id="{348F585F-56D4-4613-B860-A41D2AD95A4C}" type="slidenum">
               <a:t>&lt;#&gt;</a:t>
             </a:fld>
           </a:p>
@@ -1724,7 +1577,7 @@
             <a:spLocks noGrp="1"/>
           </p:cNvSpPr>
           <p:nvPr>
-            <p:ph type="dt" idx="1"/>
+            <p:ph type="dt" idx="3"/>
           </p:nvPr>
         </p:nvSpPr>
         <p:spPr/>
@@ -1732,7 +1585,7 @@
           <a:bodyPr/>
           <a:p>
             <a:r>
-              <a:rPr lang="ru-RU"/>
+              <a:rPr lang="en-US"/>
               <a:t/>
             </a:r>
           </a:p>
@@ -1773,7 +1626,7 @@
         <p:spPr>
           <a:xfrm>
             <a:off x="1143000" y="841680"/>
-            <a:ext cx="6857640" cy="1790280"/>
+            <a:ext cx="6857280" cy="1789920"/>
           </a:xfrm>
           <a:prstGeom prst="rect">
             <a:avLst/>
@@ -1788,11 +1641,11 @@
             <a:noAutofit/>
           </a:bodyPr>
           <a:p>
-            <a:endParaRPr b="0" lang="en-US" sz="1800" spc="-1" strike="noStrike">
-              <a:solidFill>
-                <a:srgbClr val="000000"/>
-              </a:solidFill>
-              <a:latin typeface="Calibri"/>
+            <a:pPr algn="ctr">
+              <a:buNone/>
+            </a:pPr>
+            <a:endParaRPr b="0" lang="en-US" sz="4400" spc="-1" strike="noStrike">
+              <a:latin typeface="Arial"/>
             </a:endParaRPr>
           </a:p>
         </p:txBody>
@@ -1825,20 +1678,8 @@
             <a:normAutofit/>
           </a:bodyPr>
           <a:p>
-            <a:pPr>
-              <a:lnSpc>
-                <a:spcPct val="90000"/>
-              </a:lnSpc>
-              <a:spcBef>
-                <a:spcPts val="1417"/>
-              </a:spcBef>
-              <a:buNone/>
-            </a:pPr>
-            <a:endParaRPr b="0" lang="en-US" sz="2100" spc="-1" strike="noStrike">
-              <a:solidFill>
-                <a:srgbClr val="000000"/>
-              </a:solidFill>
-              <a:latin typeface="Calibri"/>
+            <a:endParaRPr b="0" lang="en-US" sz="3200" spc="-1" strike="noStrike">
+              <a:latin typeface="Arial"/>
             </a:endParaRPr>
           </a:p>
         </p:txBody>
@@ -1850,7 +1691,7 @@
             <a:spLocks noGrp="1"/>
           </p:cNvSpPr>
           <p:nvPr>
-            <p:ph type="ftr" idx="2"/>
+            <p:ph type="ftr" idx="1"/>
           </p:nvPr>
         </p:nvSpPr>
         <p:spPr/>
@@ -1870,14 +1711,14 @@
             <a:spLocks noGrp="1"/>
           </p:cNvSpPr>
           <p:nvPr>
-            <p:ph type="sldNum" idx="3"/>
+            <p:ph type="sldNum" idx="2"/>
           </p:nvPr>
         </p:nvSpPr>
         <p:spPr/>
         <p:txBody>
           <a:bodyPr/>
           <a:p>
-            <a:fld id="{E8E28B67-D5F3-4D9A-9C63-E3D6FBB64269}" type="slidenum">
+            <a:fld id="{34C41D06-F03A-4DE9-AF96-2A269C67F581}" type="slidenum">
               <a:t>&lt;#&gt;</a:t>
             </a:fld>
           </a:p>
@@ -1890,7 +1731,7 @@
             <a:spLocks noGrp="1"/>
           </p:cNvSpPr>
           <p:nvPr>
-            <p:ph type="dt" idx="1"/>
+            <p:ph type="dt" idx="3"/>
           </p:nvPr>
         </p:nvSpPr>
         <p:spPr/>
@@ -1898,7 +1739,7 @@
           <a:bodyPr/>
           <a:p>
             <a:r>
-              <a:rPr lang="ru-RU"/>
+              <a:rPr lang="en-US"/>
               <a:t/>
             </a:r>
           </a:p>
@@ -1939,7 +1780,7 @@
         <p:spPr>
           <a:xfrm>
             <a:off x="1143000" y="841680"/>
-            <a:ext cx="6857640" cy="1790280"/>
+            <a:ext cx="6857280" cy="1789920"/>
           </a:xfrm>
           <a:prstGeom prst="rect">
             <a:avLst/>
@@ -1954,11 +1795,11 @@
             <a:noAutofit/>
           </a:bodyPr>
           <a:p>
-            <a:endParaRPr b="0" lang="en-US" sz="1800" spc="-1" strike="noStrike">
-              <a:solidFill>
-                <a:srgbClr val="000000"/>
-              </a:solidFill>
-              <a:latin typeface="Calibri"/>
+            <a:pPr algn="ctr">
+              <a:buNone/>
+            </a:pPr>
+            <a:endParaRPr b="0" lang="en-US" sz="4400" spc="-1" strike="noStrike">
+              <a:latin typeface="Arial"/>
             </a:endParaRPr>
           </a:p>
         </p:txBody>
@@ -1991,20 +1832,8 @@
             <a:normAutofit/>
           </a:bodyPr>
           <a:p>
-            <a:pPr>
-              <a:lnSpc>
-                <a:spcPct val="90000"/>
-              </a:lnSpc>
-              <a:spcBef>
-                <a:spcPts val="1417"/>
-              </a:spcBef>
-              <a:buNone/>
-            </a:pPr>
-            <a:endParaRPr b="0" lang="en-US" sz="2100" spc="-1" strike="noStrike">
-              <a:solidFill>
-                <a:srgbClr val="000000"/>
-              </a:solidFill>
-              <a:latin typeface="Calibri"/>
+            <a:endParaRPr b="0" lang="en-US" sz="3200" spc="-1" strike="noStrike">
+              <a:latin typeface="Arial"/>
             </a:endParaRPr>
           </a:p>
         </p:txBody>
@@ -2037,20 +1866,8 @@
             <a:normAutofit/>
           </a:bodyPr>
           <a:p>
-            <a:pPr>
-              <a:lnSpc>
-                <a:spcPct val="90000"/>
-              </a:lnSpc>
-              <a:spcBef>
-                <a:spcPts val="1417"/>
-              </a:spcBef>
-              <a:buNone/>
-            </a:pPr>
-            <a:endParaRPr b="0" lang="en-US" sz="2100" spc="-1" strike="noStrike">
-              <a:solidFill>
-                <a:srgbClr val="000000"/>
-              </a:solidFill>
-              <a:latin typeface="Calibri"/>
+            <a:endParaRPr b="0" lang="en-US" sz="3200" spc="-1" strike="noStrike">
+              <a:latin typeface="Arial"/>
             </a:endParaRPr>
           </a:p>
         </p:txBody>
@@ -2062,7 +1879,7 @@
             <a:spLocks noGrp="1"/>
           </p:cNvSpPr>
           <p:nvPr>
-            <p:ph type="ftr" idx="2"/>
+            <p:ph type="ftr" idx="1"/>
           </p:nvPr>
         </p:nvSpPr>
         <p:spPr/>
@@ -2082,14 +1899,14 @@
             <a:spLocks noGrp="1"/>
           </p:cNvSpPr>
           <p:nvPr>
-            <p:ph type="sldNum" idx="3"/>
+            <p:ph type="sldNum" idx="2"/>
           </p:nvPr>
         </p:nvSpPr>
         <p:spPr/>
         <p:txBody>
           <a:bodyPr/>
           <a:p>
-            <a:fld id="{48D485CF-ED67-4BA4-9038-F4502FD21E02}" type="slidenum">
+            <a:fld id="{D97849CD-07A6-4F82-B293-472E06EE5E3B}" type="slidenum">
               <a:t>&lt;#&gt;</a:t>
             </a:fld>
           </a:p>
@@ -2102,7 +1919,7 @@
             <a:spLocks noGrp="1"/>
           </p:cNvSpPr>
           <p:nvPr>
-            <p:ph type="dt" idx="1"/>
+            <p:ph type="dt" idx="3"/>
           </p:nvPr>
         </p:nvSpPr>
         <p:spPr/>
@@ -2110,7 +1927,7 @@
           <a:bodyPr/>
           <a:p>
             <a:r>
-              <a:rPr lang="ru-RU"/>
+              <a:rPr lang="en-US"/>
               <a:t/>
             </a:r>
           </a:p>
@@ -2151,7 +1968,7 @@
         <p:spPr>
           <a:xfrm>
             <a:off x="1143000" y="841680"/>
-            <a:ext cx="6857640" cy="1790280"/>
+            <a:ext cx="6857280" cy="1789920"/>
           </a:xfrm>
           <a:prstGeom prst="rect">
             <a:avLst/>
@@ -2166,11 +1983,11 @@
             <a:noAutofit/>
           </a:bodyPr>
           <a:p>
-            <a:endParaRPr b="0" lang="en-US" sz="1800" spc="-1" strike="noStrike">
-              <a:solidFill>
-                <a:srgbClr val="000000"/>
-              </a:solidFill>
-              <a:latin typeface="Calibri"/>
+            <a:pPr algn="ctr">
+              <a:buNone/>
+            </a:pPr>
+            <a:endParaRPr b="0" lang="en-US" sz="4400" spc="-1" strike="noStrike">
+              <a:latin typeface="Arial"/>
             </a:endParaRPr>
           </a:p>
         </p:txBody>
@@ -2182,7 +1999,7 @@
             <a:spLocks noGrp="1"/>
           </p:cNvSpPr>
           <p:nvPr>
-            <p:ph type="ftr" idx="2"/>
+            <p:ph type="ftr" idx="1"/>
           </p:nvPr>
         </p:nvSpPr>
         <p:spPr/>
@@ -2202,14 +2019,14 @@
             <a:spLocks noGrp="1"/>
           </p:cNvSpPr>
           <p:nvPr>
-            <p:ph type="sldNum" idx="3"/>
+            <p:ph type="sldNum" idx="2"/>
           </p:nvPr>
         </p:nvSpPr>
         <p:spPr/>
         <p:txBody>
           <a:bodyPr/>
           <a:p>
-            <a:fld id="{2A60916F-5642-466F-A88B-8FC4A0CAC283}" type="slidenum">
+            <a:fld id="{DF7A23AB-93B8-4C6A-8230-8E2EA7A7E3A8}" type="slidenum">
               <a:t>&lt;#&gt;</a:t>
             </a:fld>
           </a:p>
@@ -2222,7 +2039,7 @@
             <a:spLocks noGrp="1"/>
           </p:cNvSpPr>
           <p:nvPr>
-            <p:ph type="dt" idx="1"/>
+            <p:ph type="dt" idx="3"/>
           </p:nvPr>
         </p:nvSpPr>
         <p:spPr/>
@@ -2230,7 +2047,7 @@
           <a:bodyPr/>
           <a:p>
             <a:r>
-              <a:rPr lang="ru-RU"/>
+              <a:rPr lang="en-US"/>
               <a:t/>
             </a:r>
           </a:p>
@@ -2271,7 +2088,7 @@
         <p:spPr>
           <a:xfrm>
             <a:off x="1143000" y="841680"/>
-            <a:ext cx="6857640" cy="8299800"/>
+            <a:ext cx="6857280" cy="8298360"/>
           </a:xfrm>
           <a:prstGeom prst="rect">
             <a:avLst/>
@@ -2289,7 +2106,7 @@
             <a:pPr algn="ctr">
               <a:buNone/>
             </a:pPr>
-            <a:endParaRPr b="0" lang="ru-RU" sz="3200" spc="-1" strike="noStrike">
+            <a:endParaRPr b="0" lang="en-US" sz="3200" spc="-1" strike="noStrike">
               <a:latin typeface="Arial"/>
             </a:endParaRPr>
           </a:p>
@@ -2302,7 +2119,7 @@
             <a:spLocks noGrp="1"/>
           </p:cNvSpPr>
           <p:nvPr>
-            <p:ph type="ftr" idx="2"/>
+            <p:ph type="ftr" idx="1"/>
           </p:nvPr>
         </p:nvSpPr>
         <p:spPr/>
@@ -2322,14 +2139,14 @@
             <a:spLocks noGrp="1"/>
           </p:cNvSpPr>
           <p:nvPr>
-            <p:ph type="sldNum" idx="3"/>
+            <p:ph type="sldNum" idx="2"/>
           </p:nvPr>
         </p:nvSpPr>
         <p:spPr/>
         <p:txBody>
           <a:bodyPr/>
           <a:p>
-            <a:fld id="{38B3C4B8-E12E-470F-95B1-35A6639E5D0D}" type="slidenum">
+            <a:fld id="{85CCEE7E-18F9-41CE-B593-188AD57418D1}" type="slidenum">
               <a:t>&lt;#&gt;</a:t>
             </a:fld>
           </a:p>
@@ -2342,7 +2159,7 @@
             <a:spLocks noGrp="1"/>
           </p:cNvSpPr>
           <p:nvPr>
-            <p:ph type="dt" idx="1"/>
+            <p:ph type="dt" idx="3"/>
           </p:nvPr>
         </p:nvSpPr>
         <p:spPr/>
@@ -2350,7 +2167,7 @@
           <a:bodyPr/>
           <a:p>
             <a:r>
-              <a:rPr lang="ru-RU"/>
+              <a:rPr lang="en-US"/>
               <a:t/>
             </a:r>
           </a:p>
@@ -2391,7 +2208,7 @@
         <p:spPr>
           <a:xfrm>
             <a:off x="1143000" y="841680"/>
-            <a:ext cx="6857640" cy="1790280"/>
+            <a:ext cx="6857280" cy="1789920"/>
           </a:xfrm>
           <a:prstGeom prst="rect">
             <a:avLst/>
@@ -2406,11 +2223,11 @@
             <a:noAutofit/>
           </a:bodyPr>
           <a:p>
-            <a:endParaRPr b="0" lang="en-US" sz="1800" spc="-1" strike="noStrike">
-              <a:solidFill>
-                <a:srgbClr val="000000"/>
-              </a:solidFill>
-              <a:latin typeface="Calibri"/>
+            <a:pPr algn="ctr">
+              <a:buNone/>
+            </a:pPr>
+            <a:endParaRPr b="0" lang="en-US" sz="4400" spc="-1" strike="noStrike">
+              <a:latin typeface="Arial"/>
             </a:endParaRPr>
           </a:p>
         </p:txBody>
@@ -2443,20 +2260,8 @@
             <a:normAutofit/>
           </a:bodyPr>
           <a:p>
-            <a:pPr>
-              <a:lnSpc>
-                <a:spcPct val="90000"/>
-              </a:lnSpc>
-              <a:spcBef>
-                <a:spcPts val="1417"/>
-              </a:spcBef>
-              <a:buNone/>
-            </a:pPr>
-            <a:endParaRPr b="0" lang="en-US" sz="2100" spc="-1" strike="noStrike">
-              <a:solidFill>
-                <a:srgbClr val="000000"/>
-              </a:solidFill>
-              <a:latin typeface="Calibri"/>
+            <a:endParaRPr b="0" lang="en-US" sz="3200" spc="-1" strike="noStrike">
+              <a:latin typeface="Arial"/>
             </a:endParaRPr>
           </a:p>
         </p:txBody>
@@ -2489,20 +2294,8 @@
             <a:normAutofit/>
           </a:bodyPr>
           <a:p>
-            <a:pPr>
-              <a:lnSpc>
-                <a:spcPct val="90000"/>
-              </a:lnSpc>
-              <a:spcBef>
-                <a:spcPts val="1417"/>
-              </a:spcBef>
-              <a:buNone/>
-            </a:pPr>
-            <a:endParaRPr b="0" lang="en-US" sz="2100" spc="-1" strike="noStrike">
-              <a:solidFill>
-                <a:srgbClr val="000000"/>
-              </a:solidFill>
-              <a:latin typeface="Calibri"/>
+            <a:endParaRPr b="0" lang="en-US" sz="3200" spc="-1" strike="noStrike">
+              <a:latin typeface="Arial"/>
             </a:endParaRPr>
           </a:p>
         </p:txBody>
@@ -2535,20 +2328,8 @@
             <a:normAutofit/>
           </a:bodyPr>
           <a:p>
-            <a:pPr>
-              <a:lnSpc>
-                <a:spcPct val="90000"/>
-              </a:lnSpc>
-              <a:spcBef>
-                <a:spcPts val="1417"/>
-              </a:spcBef>
-              <a:buNone/>
-            </a:pPr>
-            <a:endParaRPr b="0" lang="en-US" sz="2100" spc="-1" strike="noStrike">
-              <a:solidFill>
-                <a:srgbClr val="000000"/>
-              </a:solidFill>
-              <a:latin typeface="Calibri"/>
+            <a:endParaRPr b="0" lang="en-US" sz="3200" spc="-1" strike="noStrike">
+              <a:latin typeface="Arial"/>
             </a:endParaRPr>
           </a:p>
         </p:txBody>
@@ -2560,7 +2341,7 @@
             <a:spLocks noGrp="1"/>
           </p:cNvSpPr>
           <p:nvPr>
-            <p:ph type="ftr" idx="2"/>
+            <p:ph type="ftr" idx="1"/>
           </p:nvPr>
         </p:nvSpPr>
         <p:spPr/>
@@ -2580,14 +2361,14 @@
             <a:spLocks noGrp="1"/>
           </p:cNvSpPr>
           <p:nvPr>
-            <p:ph type="sldNum" idx="3"/>
+            <p:ph type="sldNum" idx="2"/>
           </p:nvPr>
         </p:nvSpPr>
         <p:spPr/>
         <p:txBody>
           <a:bodyPr/>
           <a:p>
-            <a:fld id="{EB3C91E7-99D2-4961-A263-EA3128283D73}" type="slidenum">
+            <a:fld id="{DD8F1865-1EB4-4C00-9CD9-022C56335B3C}" type="slidenum">
               <a:t>&lt;#&gt;</a:t>
             </a:fld>
           </a:p>
@@ -2600,7 +2381,7 @@
             <a:spLocks noGrp="1"/>
           </p:cNvSpPr>
           <p:nvPr>
-            <p:ph type="dt" idx="1"/>
+            <p:ph type="dt" idx="3"/>
           </p:nvPr>
         </p:nvSpPr>
         <p:spPr/>
@@ -2608,7 +2389,7 @@
           <a:bodyPr/>
           <a:p>
             <a:r>
-              <a:rPr lang="ru-RU"/>
+              <a:rPr lang="en-US"/>
               <a:t/>
             </a:r>
           </a:p>
@@ -2649,7 +2430,7 @@
         <p:spPr>
           <a:xfrm>
             <a:off x="1143000" y="841680"/>
-            <a:ext cx="6857640" cy="1790280"/>
+            <a:ext cx="6857280" cy="1789920"/>
           </a:xfrm>
           <a:prstGeom prst="rect">
             <a:avLst/>
@@ -2664,11 +2445,11 @@
             <a:noAutofit/>
           </a:bodyPr>
           <a:p>
-            <a:endParaRPr b="0" lang="en-US" sz="1800" spc="-1" strike="noStrike">
-              <a:solidFill>
-                <a:srgbClr val="000000"/>
-              </a:solidFill>
-              <a:latin typeface="Calibri"/>
+            <a:pPr algn="ctr">
+              <a:buNone/>
+            </a:pPr>
+            <a:endParaRPr b="0" lang="en-US" sz="4400" spc="-1" strike="noStrike">
+              <a:latin typeface="Arial"/>
             </a:endParaRPr>
           </a:p>
         </p:txBody>
@@ -2701,20 +2482,8 @@
             <a:normAutofit/>
           </a:bodyPr>
           <a:p>
-            <a:pPr>
-              <a:lnSpc>
-                <a:spcPct val="90000"/>
-              </a:lnSpc>
-              <a:spcBef>
-                <a:spcPts val="1417"/>
-              </a:spcBef>
-              <a:buNone/>
-            </a:pPr>
-            <a:endParaRPr b="0" lang="en-US" sz="2100" spc="-1" strike="noStrike">
-              <a:solidFill>
-                <a:srgbClr val="000000"/>
-              </a:solidFill>
-              <a:latin typeface="Calibri"/>
+            <a:endParaRPr b="0" lang="en-US" sz="3200" spc="-1" strike="noStrike">
+              <a:latin typeface="Arial"/>
             </a:endParaRPr>
           </a:p>
         </p:txBody>
@@ -2747,20 +2516,8 @@
             <a:normAutofit/>
           </a:bodyPr>
           <a:p>
-            <a:pPr>
-              <a:lnSpc>
-                <a:spcPct val="90000"/>
-              </a:lnSpc>
-              <a:spcBef>
-                <a:spcPts val="1417"/>
-              </a:spcBef>
-              <a:buNone/>
-            </a:pPr>
-            <a:endParaRPr b="0" lang="en-US" sz="2100" spc="-1" strike="noStrike">
-              <a:solidFill>
-                <a:srgbClr val="000000"/>
-              </a:solidFill>
-              <a:latin typeface="Calibri"/>
+            <a:endParaRPr b="0" lang="en-US" sz="3200" spc="-1" strike="noStrike">
+              <a:latin typeface="Arial"/>
             </a:endParaRPr>
           </a:p>
         </p:txBody>
@@ -2793,20 +2550,8 @@
             <a:normAutofit/>
           </a:bodyPr>
           <a:p>
-            <a:pPr>
-              <a:lnSpc>
-                <a:spcPct val="90000"/>
-              </a:lnSpc>
-              <a:spcBef>
-                <a:spcPts val="1417"/>
-              </a:spcBef>
-              <a:buNone/>
-            </a:pPr>
-            <a:endParaRPr b="0" lang="en-US" sz="2100" spc="-1" strike="noStrike">
-              <a:solidFill>
-                <a:srgbClr val="000000"/>
-              </a:solidFill>
-              <a:latin typeface="Calibri"/>
+            <a:endParaRPr b="0" lang="en-US" sz="3200" spc="-1" strike="noStrike">
+              <a:latin typeface="Arial"/>
             </a:endParaRPr>
           </a:p>
         </p:txBody>
@@ -2818,7 +2563,7 @@
             <a:spLocks noGrp="1"/>
           </p:cNvSpPr>
           <p:nvPr>
-            <p:ph type="ftr" idx="2"/>
+            <p:ph type="ftr" idx="1"/>
           </p:nvPr>
         </p:nvSpPr>
         <p:spPr/>
@@ -2838,14 +2583,14 @@
             <a:spLocks noGrp="1"/>
           </p:cNvSpPr>
           <p:nvPr>
-            <p:ph type="sldNum" idx="3"/>
+            <p:ph type="sldNum" idx="2"/>
           </p:nvPr>
         </p:nvSpPr>
         <p:spPr/>
         <p:txBody>
           <a:bodyPr/>
           <a:p>
-            <a:fld id="{8383C45A-D6C1-4A0D-842C-66522E535D4A}" type="slidenum">
+            <a:fld id="{CD32D9C3-D1E6-4B2F-9E76-AFDB6174B17E}" type="slidenum">
               <a:t>&lt;#&gt;</a:t>
             </a:fld>
           </a:p>
@@ -2858,7 +2603,7 @@
             <a:spLocks noGrp="1"/>
           </p:cNvSpPr>
           <p:nvPr>
-            <p:ph type="dt" idx="1"/>
+            <p:ph type="dt" idx="3"/>
           </p:nvPr>
         </p:nvSpPr>
         <p:spPr/>
@@ -2866,7 +2611,7 @@
           <a:bodyPr/>
           <a:p>
             <a:r>
-              <a:rPr lang="ru-RU"/>
+              <a:rPr lang="en-US"/>
               <a:t/>
             </a:r>
           </a:p>
@@ -2907,7 +2652,7 @@
         <p:spPr>
           <a:xfrm>
             <a:off x="1143000" y="841680"/>
-            <a:ext cx="6857640" cy="1790280"/>
+            <a:ext cx="6857280" cy="1789920"/>
           </a:xfrm>
           <a:prstGeom prst="rect">
             <a:avLst/>
@@ -2922,11 +2667,11 @@
             <a:noAutofit/>
           </a:bodyPr>
           <a:p>
-            <a:endParaRPr b="0" lang="en-US" sz="1800" spc="-1" strike="noStrike">
-              <a:solidFill>
-                <a:srgbClr val="000000"/>
-              </a:solidFill>
-              <a:latin typeface="Calibri"/>
+            <a:pPr algn="ctr">
+              <a:buNone/>
+            </a:pPr>
+            <a:endParaRPr b="0" lang="en-US" sz="4400" spc="-1" strike="noStrike">
+              <a:latin typeface="Arial"/>
             </a:endParaRPr>
           </a:p>
         </p:txBody>
@@ -2959,20 +2704,8 @@
             <a:normAutofit/>
           </a:bodyPr>
           <a:p>
-            <a:pPr>
-              <a:lnSpc>
-                <a:spcPct val="90000"/>
-              </a:lnSpc>
-              <a:spcBef>
-                <a:spcPts val="1417"/>
-              </a:spcBef>
-              <a:buNone/>
-            </a:pPr>
-            <a:endParaRPr b="0" lang="en-US" sz="2100" spc="-1" strike="noStrike">
-              <a:solidFill>
-                <a:srgbClr val="000000"/>
-              </a:solidFill>
-              <a:latin typeface="Calibri"/>
+            <a:endParaRPr b="0" lang="en-US" sz="3200" spc="-1" strike="noStrike">
+              <a:latin typeface="Arial"/>
             </a:endParaRPr>
           </a:p>
         </p:txBody>
@@ -3005,20 +2738,8 @@
             <a:normAutofit/>
           </a:bodyPr>
           <a:p>
-            <a:pPr>
-              <a:lnSpc>
-                <a:spcPct val="90000"/>
-              </a:lnSpc>
-              <a:spcBef>
-                <a:spcPts val="1417"/>
-              </a:spcBef>
-              <a:buNone/>
-            </a:pPr>
-            <a:endParaRPr b="0" lang="en-US" sz="2100" spc="-1" strike="noStrike">
-              <a:solidFill>
-                <a:srgbClr val="000000"/>
-              </a:solidFill>
-              <a:latin typeface="Calibri"/>
+            <a:endParaRPr b="0" lang="en-US" sz="3200" spc="-1" strike="noStrike">
+              <a:latin typeface="Arial"/>
             </a:endParaRPr>
           </a:p>
         </p:txBody>
@@ -3051,20 +2772,8 @@
             <a:normAutofit/>
           </a:bodyPr>
           <a:p>
-            <a:pPr>
-              <a:lnSpc>
-                <a:spcPct val="90000"/>
-              </a:lnSpc>
-              <a:spcBef>
-                <a:spcPts val="1417"/>
-              </a:spcBef>
-              <a:buNone/>
-            </a:pPr>
-            <a:endParaRPr b="0" lang="en-US" sz="2100" spc="-1" strike="noStrike">
-              <a:solidFill>
-                <a:srgbClr val="000000"/>
-              </a:solidFill>
-              <a:latin typeface="Calibri"/>
+            <a:endParaRPr b="0" lang="en-US" sz="3200" spc="-1" strike="noStrike">
+              <a:latin typeface="Arial"/>
             </a:endParaRPr>
           </a:p>
         </p:txBody>
@@ -3076,7 +2785,7 @@
             <a:spLocks noGrp="1"/>
           </p:cNvSpPr>
           <p:nvPr>
-            <p:ph type="ftr" idx="2"/>
+            <p:ph type="ftr" idx="1"/>
           </p:nvPr>
         </p:nvSpPr>
         <p:spPr/>
@@ -3096,14 +2805,14 @@
             <a:spLocks noGrp="1"/>
           </p:cNvSpPr>
           <p:nvPr>
-            <p:ph type="sldNum" idx="3"/>
+            <p:ph type="sldNum" idx="2"/>
           </p:nvPr>
         </p:nvSpPr>
         <p:spPr/>
         <p:txBody>
           <a:bodyPr/>
           <a:p>
-            <a:fld id="{C482517A-7375-4734-9556-D2603DFA6EE9}" type="slidenum">
+            <a:fld id="{14AF1B6C-C3C0-431F-A6A5-70468D00796E}" type="slidenum">
               <a:t>&lt;#&gt;</a:t>
             </a:fld>
           </a:p>
@@ -3116,7 +2825,7 @@
             <a:spLocks noGrp="1"/>
           </p:cNvSpPr>
           <p:nvPr>
-            <p:ph type="dt" idx="1"/>
+            <p:ph type="dt" idx="3"/>
           </p:nvPr>
         </p:nvSpPr>
         <p:spPr/>
@@ -3124,7 +2833,7 @@
           <a:bodyPr/>
           <a:p>
             <a:r>
-              <a:rPr lang="ru-RU"/>
+              <a:rPr lang="en-US"/>
               <a:t/>
             </a:r>
           </a:p>
@@ -3172,74 +2881,119 @@
         <p:spPr>
           <a:xfrm>
             <a:off x="1143000" y="841680"/>
-            <a:ext cx="6857640" cy="1790280"/>
-          </a:xfrm>
-          <a:prstGeom prst="rect">
-            <a:avLst/>
-          </a:prstGeom>
-          <a:noFill/>
-          <a:ln w="0">
-            <a:noFill/>
-          </a:ln>
-        </p:spPr>
-        <p:txBody>
-          <a:bodyPr anchor="b">
-            <a:noAutofit/>
-          </a:bodyPr>
+            <a:ext cx="6857280" cy="1789920"/>
+          </a:xfrm>
+          <a:prstGeom prst="rect">
+            <a:avLst/>
+          </a:prstGeom>
+          <a:noFill/>
+          <a:ln w="0">
+            <a:noFill/>
+          </a:ln>
+        </p:spPr>
+        <p:txBody>
+          <a:bodyPr lIns="0" rIns="0" tIns="0" bIns="0" anchor="ctr">
+            <a:noAutofit/>
+          </a:bodyPr>
+          <a:p>
+            <a:r>
+              <a:rPr b="0" lang="en-US" sz="1800" spc="-1" strike="noStrike">
+                <a:latin typeface="Arial"/>
+              </a:rPr>
+              <a:t>Click to edit the title text format</a:t>
+            </a:r>
+            <a:endParaRPr b="0" lang="en-US" sz="1800" spc="-1" strike="noStrike">
+              <a:latin typeface="Arial"/>
+            </a:endParaRPr>
+          </a:p>
+        </p:txBody>
+      </p:sp>
+      <p:sp>
+        <p:nvSpPr>
+          <p:cNvPr id="1" name="PlaceHolder 2"/>
+          <p:cNvSpPr>
+            <a:spLocks noGrp="1"/>
+          </p:cNvSpPr>
+          <p:nvPr>
+            <p:ph type="ftr" idx="1"/>
+          </p:nvPr>
+        </p:nvSpPr>
+        <p:spPr>
+          <a:xfrm>
+            <a:off x="3029040" y="4767120"/>
+            <a:ext cx="3085560" cy="273240"/>
+          </a:xfrm>
+          <a:prstGeom prst="rect">
+            <a:avLst/>
+          </a:prstGeom>
+          <a:noFill/>
+          <a:ln w="0">
+            <a:noFill/>
+          </a:ln>
+        </p:spPr>
+        <p:txBody>
+          <a:bodyPr lIns="90000" rIns="90000" tIns="45000" bIns="45000" anchor="ctr">
+            <a:noAutofit/>
+          </a:bodyPr>
+          <a:lstStyle>
+            <a:lvl1pPr algn="ctr">
+              <a:lnSpc>
+                <a:spcPct val="100000"/>
+              </a:lnSpc>
+              <a:buNone/>
+              <a:defRPr b="0" lang="ru-RU" sz="1400" spc="-1" strike="noStrike">
+                <a:latin typeface="Times New Roman"/>
+              </a:defRPr>
+            </a:lvl1pPr>
+          </a:lstStyle>
           <a:p>
             <a:pPr algn="ctr">
               <a:lnSpc>
-                <a:spcPct val="90000"/>
+                <a:spcPct val="100000"/>
               </a:lnSpc>
               <a:buNone/>
             </a:pPr>
             <a:r>
-              <a:rPr b="0" lang="ru-RU" sz="4500" spc="-1" strike="noStrike">
-                <a:solidFill>
-                  <a:srgbClr val="000000"/>
-                </a:solidFill>
-                <a:latin typeface="Calibri Light"/>
-              </a:rPr>
-              <a:t>Образец заголовка</a:t>
-            </a:r>
-            <a:endParaRPr b="0" lang="en-US" sz="4500" spc="-1" strike="noStrike">
-              <a:solidFill>
-                <a:srgbClr val="000000"/>
-              </a:solidFill>
-              <a:latin typeface="Calibri"/>
-            </a:endParaRPr>
-          </a:p>
-        </p:txBody>
-      </p:sp>
-      <p:sp>
-        <p:nvSpPr>
-          <p:cNvPr id="1" name="PlaceHolder 2"/>
-          <p:cNvSpPr>
-            <a:spLocks noGrp="1"/>
-          </p:cNvSpPr>
-          <p:nvPr>
-            <p:ph type="dt" idx="1"/>
-          </p:nvPr>
-        </p:nvSpPr>
-        <p:spPr>
-          <a:xfrm>
-            <a:off x="628560" y="4767120"/>
-            <a:ext cx="2057040" cy="273600"/>
-          </a:xfrm>
-          <a:prstGeom prst="rect">
-            <a:avLst/>
-          </a:prstGeom>
-          <a:noFill/>
-          <a:ln w="0">
-            <a:noFill/>
-          </a:ln>
-        </p:spPr>
-        <p:txBody>
-          <a:bodyPr anchor="ctr">
+              <a:rPr b="0" lang="ru-RU" sz="1400" spc="-1" strike="noStrike">
+                <a:latin typeface="Times New Roman"/>
+              </a:rPr>
+              <a:t>&lt;footer&gt;</a:t>
+            </a:r>
+            <a:endParaRPr b="0" lang="en-US" sz="1400" spc="-1" strike="noStrike">
+              <a:latin typeface="Times New Roman"/>
+            </a:endParaRPr>
+          </a:p>
+        </p:txBody>
+      </p:sp>
+      <p:sp>
+        <p:nvSpPr>
+          <p:cNvPr id="2" name="PlaceHolder 3"/>
+          <p:cNvSpPr>
+            <a:spLocks noGrp="1"/>
+          </p:cNvSpPr>
+          <p:nvPr>
+            <p:ph type="sldNum" idx="2"/>
+          </p:nvPr>
+        </p:nvSpPr>
+        <p:spPr>
+          <a:xfrm>
+            <a:off x="6458040" y="4767120"/>
+            <a:ext cx="2056680" cy="273240"/>
+          </a:xfrm>
+          <a:prstGeom prst="rect">
+            <a:avLst/>
+          </a:prstGeom>
+          <a:noFill/>
+          <a:ln w="0">
+            <a:noFill/>
+          </a:ln>
+        </p:spPr>
+        <p:txBody>
+          <a:bodyPr lIns="90000" rIns="90000" tIns="45000" bIns="45000" anchor="ctr">
             <a:noAutofit/>
           </a:bodyPr>
           <a:lstStyle>
-            <a:lvl1pPr>
+            <a:lvl1pPr algn="r">
               <a:lnSpc>
                 <a:spcPct val="100000"/>
               </a:lnSpc>
@@ -3253,22 +3007,22 @@
             </a:lvl1pPr>
           </a:lstStyle>
           <a:p>
-            <a:pPr>
+            <a:pPr algn="r">
               <a:lnSpc>
                 <a:spcPct val="100000"/>
               </a:lnSpc>
               <a:buNone/>
             </a:pPr>
-            <a:r>
+            <a:fld id="{11F3F35F-C204-476C-81C1-598653B47BD0}" type="slidenum">
               <a:rPr b="0" lang="en-US" sz="900" spc="-1" strike="noStrike">
                 <a:solidFill>
                   <a:srgbClr val="8b8b8b"/>
                 </a:solidFill>
                 <a:latin typeface="Calibri"/>
               </a:rPr>
-              <a:t>&lt;дата/время&gt;</a:t>
-            </a:r>
-            <a:endParaRPr b="0" lang="ru-RU" sz="900" spc="-1" strike="noStrike">
+              <a:t>&lt;number&gt;</a:t>
+            </a:fld>
+            <a:endParaRPr b="0" lang="en-US" sz="900" spc="-1" strike="noStrike">
               <a:latin typeface="Times New Roman"/>
             </a:endParaRPr>
           </a:p>
@@ -3276,113 +3030,46 @@
       </p:sp>
       <p:sp>
         <p:nvSpPr>
-          <p:cNvPr id="2" name="PlaceHolder 3"/>
-          <p:cNvSpPr>
-            <a:spLocks noGrp="1"/>
-          </p:cNvSpPr>
-          <p:nvPr>
-            <p:ph type="ftr" idx="2"/>
-          </p:nvPr>
-        </p:nvSpPr>
-        <p:spPr>
-          <a:xfrm>
-            <a:off x="3029040" y="4767120"/>
-            <a:ext cx="3085920" cy="273600"/>
-          </a:xfrm>
-          <a:prstGeom prst="rect">
-            <a:avLst/>
-          </a:prstGeom>
-          <a:noFill/>
-          <a:ln w="0">
-            <a:noFill/>
-          </a:ln>
-        </p:spPr>
-        <p:txBody>
-          <a:bodyPr anchor="ctr">
+          <p:cNvPr id="3" name="PlaceHolder 4"/>
+          <p:cNvSpPr>
+            <a:spLocks noGrp="1"/>
+          </p:cNvSpPr>
+          <p:nvPr>
+            <p:ph type="dt" idx="3"/>
+          </p:nvPr>
+        </p:nvSpPr>
+        <p:spPr>
+          <a:xfrm>
+            <a:off x="628560" y="4767120"/>
+            <a:ext cx="2056680" cy="273240"/>
+          </a:xfrm>
+          <a:prstGeom prst="rect">
+            <a:avLst/>
+          </a:prstGeom>
+          <a:noFill/>
+          <a:ln w="0">
+            <a:noFill/>
+          </a:ln>
+        </p:spPr>
+        <p:txBody>
+          <a:bodyPr lIns="90000" rIns="90000" tIns="45000" bIns="45000" anchor="ctr">
             <a:noAutofit/>
           </a:bodyPr>
           <a:lstStyle>
-            <a:lvl1pPr algn="ctr">
-              <a:buNone/>
-              <a:defRPr b="0" lang="ru-RU" sz="1400" spc="-1" strike="noStrike">
+            <a:lvl1pPr>
+              <a:defRPr b="0" lang="en-US" sz="1400" spc="-1" strike="noStrike">
                 <a:latin typeface="Times New Roman"/>
               </a:defRPr>
             </a:lvl1pPr>
           </a:lstStyle>
           <a:p>
-            <a:pPr algn="ctr">
-              <a:buNone/>
-            </a:pPr>
-            <a:r>
-              <a:rPr b="0" lang="ru-RU" sz="1400" spc="-1" strike="noStrike">
+            <a:r>
+              <a:rPr b="0" lang="en-US" sz="1400" spc="-1" strike="noStrike">
                 <a:latin typeface="Times New Roman"/>
               </a:rPr>
-              <a:t>&lt;нижний колонтитул&gt;</a:t>
-            </a:r>
-            <a:endParaRPr b="0" lang="ru-RU" sz="1400" spc="-1" strike="noStrike">
-              <a:latin typeface="Times New Roman"/>
-            </a:endParaRPr>
-          </a:p>
-        </p:txBody>
-      </p:sp>
-      <p:sp>
-        <p:nvSpPr>
-          <p:cNvPr id="3" name="PlaceHolder 4"/>
-          <p:cNvSpPr>
-            <a:spLocks noGrp="1"/>
-          </p:cNvSpPr>
-          <p:nvPr>
-            <p:ph type="sldNum" idx="3"/>
-          </p:nvPr>
-        </p:nvSpPr>
-        <p:spPr>
-          <a:xfrm>
-            <a:off x="6458040" y="4767120"/>
-            <a:ext cx="2057040" cy="273600"/>
-          </a:xfrm>
-          <a:prstGeom prst="rect">
-            <a:avLst/>
-          </a:prstGeom>
-          <a:noFill/>
-          <a:ln w="0">
-            <a:noFill/>
-          </a:ln>
-        </p:spPr>
-        <p:txBody>
-          <a:bodyPr anchor="ctr">
-            <a:noAutofit/>
-          </a:bodyPr>
-          <a:lstStyle>
-            <a:lvl1pPr algn="r">
-              <a:lnSpc>
-                <a:spcPct val="100000"/>
-              </a:lnSpc>
-              <a:buNone/>
-              <a:defRPr b="0" lang="en-US" sz="900" spc="-1" strike="noStrike">
-                <a:solidFill>
-                  <a:srgbClr val="8b8b8b"/>
-                </a:solidFill>
-                <a:latin typeface="Calibri"/>
-              </a:defRPr>
-            </a:lvl1pPr>
-          </a:lstStyle>
-          <a:p>
-            <a:pPr algn="r">
-              <a:lnSpc>
-                <a:spcPct val="100000"/>
-              </a:lnSpc>
-              <a:buNone/>
-            </a:pPr>
-            <a:fld id="{8457FA69-9BA0-453B-9DC2-9A66CBFBC889}" type="slidenum">
-              <a:rPr b="0" lang="en-US" sz="900" spc="-1" strike="noStrike">
-                <a:solidFill>
-                  <a:srgbClr val="8b8b8b"/>
-                </a:solidFill>
-                <a:latin typeface="Calibri"/>
-              </a:rPr>
-              <a:t>&lt;номер&gt;</a:t>
-            </a:fld>
-            <a:endParaRPr b="0" lang="ru-RU" sz="900" spc="-1" strike="noStrike">
+              <a:t>&lt;date/time&gt;</a:t>
+            </a:r>
+            <a:endParaRPr b="0" lang="en-US" sz="1400" spc="-1" strike="noStrike">
               <a:latin typeface="Times New Roman"/>
             </a:endParaRPr>
           </a:p>
@@ -3417,9 +3104,6 @@
           </a:bodyPr>
           <a:p>
             <a:pPr marL="432000" indent="-324000">
-              <a:lnSpc>
-                <a:spcPct val="90000"/>
-              </a:lnSpc>
               <a:spcBef>
                 <a:spcPts val="1417"/>
               </a:spcBef>
@@ -3431,26 +3115,17 @@
               <a:buChar char=""/>
             </a:pPr>
             <a:r>
-              <a:rPr b="0" lang="en-US" sz="2100" spc="-1" strike="noStrike">
-                <a:solidFill>
-                  <a:srgbClr val="000000"/>
-                </a:solidFill>
-                <a:latin typeface="Calibri"/>
-              </a:rPr>
-              <a:t>Для правки структуры щёлкните мышью</a:t>
-            </a:r>
-            <a:endParaRPr b="0" lang="en-US" sz="2100" spc="-1" strike="noStrike">
-              <a:solidFill>
-                <a:srgbClr val="000000"/>
-              </a:solidFill>
-              <a:latin typeface="Calibri"/>
+              <a:rPr b="0" lang="en-US" sz="3200" spc="-1" strike="noStrike">
+                <a:latin typeface="Arial"/>
+              </a:rPr>
+              <a:t>Click to edit the outline text format</a:t>
+            </a:r>
+            <a:endParaRPr b="0" lang="en-US" sz="3200" spc="-1" strike="noStrike">
+              <a:latin typeface="Arial"/>
             </a:endParaRPr>
           </a:p>
           <a:p>
             <a:pPr lvl="1" marL="864000" indent="-324000">
-              <a:lnSpc>
-                <a:spcPct val="90000"/>
-              </a:lnSpc>
               <a:spcBef>
                 <a:spcPts val="1134"/>
               </a:spcBef>
@@ -3462,26 +3137,17 @@
               <a:buChar char=""/>
             </a:pPr>
             <a:r>
-              <a:rPr b="0" lang="en-US" sz="1500" spc="-1" strike="noStrike">
-                <a:solidFill>
-                  <a:srgbClr val="000000"/>
-                </a:solidFill>
-                <a:latin typeface="Calibri"/>
-              </a:rPr>
-              <a:t>Второй уровень структуры</a:t>
-            </a:r>
-            <a:endParaRPr b="0" lang="en-US" sz="1500" spc="-1" strike="noStrike">
-              <a:solidFill>
-                <a:srgbClr val="000000"/>
-              </a:solidFill>
-              <a:latin typeface="Calibri"/>
+              <a:rPr b="0" lang="en-US" sz="2800" spc="-1" strike="noStrike">
+                <a:latin typeface="Arial"/>
+              </a:rPr>
+              <a:t>Second Outline Level</a:t>
+            </a:r>
+            <a:endParaRPr b="0" lang="en-US" sz="2800" spc="-1" strike="noStrike">
+              <a:latin typeface="Arial"/>
             </a:endParaRPr>
           </a:p>
           <a:p>
             <a:pPr lvl="2" marL="1296000" indent="-288000">
-              <a:lnSpc>
-                <a:spcPct val="90000"/>
-              </a:lnSpc>
               <a:spcBef>
                 <a:spcPts val="850"/>
               </a:spcBef>
@@ -3493,26 +3159,17 @@
               <a:buChar char=""/>
             </a:pPr>
             <a:r>
-              <a:rPr b="0" lang="en-US" sz="1350" spc="-1" strike="noStrike">
-                <a:solidFill>
-                  <a:srgbClr val="000000"/>
-                </a:solidFill>
-                <a:latin typeface="Calibri"/>
-              </a:rPr>
-              <a:t>Третий уровень структуры</a:t>
-            </a:r>
-            <a:endParaRPr b="0" lang="en-US" sz="1350" spc="-1" strike="noStrike">
-              <a:solidFill>
-                <a:srgbClr val="000000"/>
-              </a:solidFill>
-              <a:latin typeface="Calibri"/>
+              <a:rPr b="0" lang="en-US" sz="2400" spc="-1" strike="noStrike">
+                <a:latin typeface="Arial"/>
+              </a:rPr>
+              <a:t>Third Outline Level</a:t>
+            </a:r>
+            <a:endParaRPr b="0" lang="en-US" sz="2400" spc="-1" strike="noStrike">
+              <a:latin typeface="Arial"/>
             </a:endParaRPr>
           </a:p>
           <a:p>
             <a:pPr lvl="3" marL="1728000" indent="-216000">
-              <a:lnSpc>
-                <a:spcPct val="90000"/>
-              </a:lnSpc>
               <a:spcBef>
                 <a:spcPts val="567"/>
               </a:spcBef>
@@ -3524,26 +3181,17 @@
               <a:buChar char=""/>
             </a:pPr>
             <a:r>
-              <a:rPr b="0" lang="en-US" sz="1350" spc="-1" strike="noStrike">
-                <a:solidFill>
-                  <a:srgbClr val="000000"/>
-                </a:solidFill>
-                <a:latin typeface="Calibri"/>
-              </a:rPr>
-              <a:t>Четвёртый уровень структуры</a:t>
-            </a:r>
-            <a:endParaRPr b="0" lang="en-US" sz="1350" spc="-1" strike="noStrike">
-              <a:solidFill>
-                <a:srgbClr val="000000"/>
-              </a:solidFill>
-              <a:latin typeface="Calibri"/>
+              <a:rPr b="0" lang="en-US" sz="2000" spc="-1" strike="noStrike">
+                <a:latin typeface="Arial"/>
+              </a:rPr>
+              <a:t>Fourth Outline Level</a:t>
+            </a:r>
+            <a:endParaRPr b="0" lang="en-US" sz="2000" spc="-1" strike="noStrike">
+              <a:latin typeface="Arial"/>
             </a:endParaRPr>
           </a:p>
           <a:p>
             <a:pPr lvl="4" marL="2160000" indent="-216000">
-              <a:lnSpc>
-                <a:spcPct val="90000"/>
-              </a:lnSpc>
               <a:spcBef>
                 <a:spcPts val="283"/>
               </a:spcBef>
@@ -3556,25 +3204,16 @@
             </a:pPr>
             <a:r>
               <a:rPr b="0" lang="en-US" sz="2000" spc="-1" strike="noStrike">
-                <a:solidFill>
-                  <a:srgbClr val="000000"/>
-                </a:solidFill>
-                <a:latin typeface="Calibri"/>
-              </a:rPr>
-              <a:t>Пятый уровень структуры</a:t>
+                <a:latin typeface="Arial"/>
+              </a:rPr>
+              <a:t>Fifth Outline Level</a:t>
             </a:r>
             <a:endParaRPr b="0" lang="en-US" sz="2000" spc="-1" strike="noStrike">
-              <a:solidFill>
-                <a:srgbClr val="000000"/>
-              </a:solidFill>
-              <a:latin typeface="Calibri"/>
+              <a:latin typeface="Arial"/>
             </a:endParaRPr>
           </a:p>
           <a:p>
             <a:pPr lvl="5" marL="2592000" indent="-216000">
-              <a:lnSpc>
-                <a:spcPct val="90000"/>
-              </a:lnSpc>
               <a:spcBef>
                 <a:spcPts val="283"/>
               </a:spcBef>
@@ -3587,25 +3226,16 @@
             </a:pPr>
             <a:r>
               <a:rPr b="0" lang="en-US" sz="2000" spc="-1" strike="noStrike">
-                <a:solidFill>
-                  <a:srgbClr val="000000"/>
-                </a:solidFill>
-                <a:latin typeface="Calibri"/>
-              </a:rPr>
-              <a:t>Шестой уровень структуры</a:t>
+                <a:latin typeface="Arial"/>
+              </a:rPr>
+              <a:t>Sixth Outline Level</a:t>
             </a:r>
             <a:endParaRPr b="0" lang="en-US" sz="2000" spc="-1" strike="noStrike">
-              <a:solidFill>
-                <a:srgbClr val="000000"/>
-              </a:solidFill>
-              <a:latin typeface="Calibri"/>
+              <a:latin typeface="Arial"/>
             </a:endParaRPr>
           </a:p>
           <a:p>
             <a:pPr lvl="6" marL="3024000" indent="-216000">
-              <a:lnSpc>
-                <a:spcPct val="90000"/>
-              </a:lnSpc>
               <a:spcBef>
                 <a:spcPts val="283"/>
               </a:spcBef>
@@ -3618,18 +3248,12 @@
             </a:pPr>
             <a:r>
               <a:rPr b="0" lang="en-US" sz="2000" spc="-1" strike="noStrike">
-                <a:solidFill>
-                  <a:srgbClr val="000000"/>
-                </a:solidFill>
-                <a:latin typeface="Calibri"/>
-              </a:rPr>
-              <a:t>Седьмой уровень структуры</a:t>
+                <a:latin typeface="Arial"/>
+              </a:rPr>
+              <a:t>Seventh Outline Level</a:t>
             </a:r>
             <a:endParaRPr b="0" lang="en-US" sz="2000" spc="-1" strike="noStrike">
-              <a:solidFill>
-                <a:srgbClr val="000000"/>
-              </a:solidFill>
-              <a:latin typeface="Calibri"/>
+              <a:latin typeface="Arial"/>
             </a:endParaRPr>
           </a:p>
         </p:txBody>
@@ -3687,7 +3311,7 @@
         <p:spPr>
           <a:xfrm>
             <a:off x="186840" y="185400"/>
-            <a:ext cx="8770320" cy="4758120"/>
+            <a:ext cx="8769960" cy="4757760"/>
           </a:xfrm>
           <a:prstGeom prst="roundRect">
             <a:avLst>
@@ -3725,7 +3349,7 @@
         <p:spPr>
           <a:xfrm>
             <a:off x="460080" y="658080"/>
-            <a:ext cx="8469000" cy="3306960"/>
+            <a:ext cx="8468640" cy="3306600"/>
           </a:xfrm>
           <a:prstGeom prst="rect">
             <a:avLst/>
@@ -3762,58 +3386,7 @@
               </a:rPr>
               <a:t>TITLE</a:t>
             </a:r>
-            <a:endParaRPr b="0" lang="ru-RU" sz="5400" spc="-1" strike="noStrike">
-              <a:latin typeface="Arial"/>
-            </a:endParaRPr>
-          </a:p>
-        </p:txBody>
-      </p:sp>
-      <p:sp>
-        <p:nvSpPr>
-          <p:cNvPr id="49" name="Прямоугольник 5"/>
-          <p:cNvSpPr/>
-          <p:nvPr/>
-        </p:nvSpPr>
-        <p:spPr>
-          <a:xfrm>
-            <a:off x="460080" y="358920"/>
-            <a:ext cx="2999160" cy="269640"/>
-          </a:xfrm>
-          <a:prstGeom prst="rect">
-            <a:avLst/>
-          </a:prstGeom>
-          <a:noFill/>
-          <a:ln w="0">
-            <a:noFill/>
-          </a:ln>
-        </p:spPr>
-        <p:style>
-          <a:lnRef idx="0"/>
-          <a:fillRef idx="0"/>
-          <a:effectRef idx="0"/>
-          <a:fontRef idx="minor"/>
-        </p:style>
-        <p:txBody>
-          <a:bodyPr lIns="90000" rIns="90000" tIns="45000" bIns="45000" anchor="t">
-            <a:noAutofit/>
-          </a:bodyPr>
-          <a:p>
-            <a:pPr>
-              <a:lnSpc>
-                <a:spcPts val="1650"/>
-              </a:lnSpc>
-              <a:buNone/>
-            </a:pPr>
-            <a:r>
-              <a:rPr b="0" lang="ru-RU" sz="1400" spc="-1" strike="noStrike">
-                <a:solidFill>
-                  <a:srgbClr val="f2f2f2"/>
-                </a:solidFill>
-                <a:latin typeface="Arial"/>
-              </a:rPr>
-              <a:t>Тема:</a:t>
-            </a:r>
-            <a:endParaRPr b="0" lang="ru-RU" sz="1400" spc="-1" strike="noStrike">
+            <a:endParaRPr b="0" lang="en-US" sz="5400" spc="-1" strike="noStrike">
               <a:latin typeface="Arial"/>
             </a:endParaRPr>
           </a:p>
@@ -3858,14 +3431,14 @@
       </p:grpSpPr>
       <p:sp>
         <p:nvSpPr>
-          <p:cNvPr id="50" name="Прямоугольник со скругленными углами 3"/>
+          <p:cNvPr id="49" name="Прямоугольник со скругленными углами 3"/>
           <p:cNvSpPr/>
           <p:nvPr/>
         </p:nvSpPr>
         <p:spPr>
           <a:xfrm>
             <a:off x="3507480" y="0"/>
-            <a:ext cx="5636160" cy="5143320"/>
+            <a:ext cx="5635800" cy="5142960"/>
           </a:xfrm>
           <a:prstGeom prst="roundRect">
             <a:avLst>
@@ -3914,22 +3487,22 @@
               </a:rPr>
               <a:t>PIC</a:t>
             </a:r>
-            <a:endParaRPr b="0" lang="ru-RU" sz="1800" spc="-1" strike="noStrike">
-              <a:latin typeface="Arial"/>
-            </a:endParaRPr>
-          </a:p>
-        </p:txBody>
-      </p:sp>
-      <p:sp>
-        <p:nvSpPr>
-          <p:cNvPr id="51" name="Прямоугольник: скругленные углы 2"/>
+            <a:endParaRPr b="0" lang="en-US" sz="1800" spc="-1" strike="noStrike">
+              <a:latin typeface="Arial"/>
+            </a:endParaRPr>
+          </a:p>
+        </p:txBody>
+      </p:sp>
+      <p:sp>
+        <p:nvSpPr>
+          <p:cNvPr id="50" name="Прямоугольник: скругленные углы 2"/>
           <p:cNvSpPr/>
           <p:nvPr/>
         </p:nvSpPr>
         <p:spPr>
           <a:xfrm>
             <a:off x="3722040" y="257040"/>
-            <a:ext cx="5186160" cy="4650120"/>
+            <a:ext cx="5185800" cy="4649760"/>
           </a:xfrm>
           <a:prstGeom prst="roundRect">
             <a:avLst>
@@ -3963,14 +3536,14 @@
       </p:sp>
       <p:sp>
         <p:nvSpPr>
-          <p:cNvPr id="52" name="Овал 1"/>
+          <p:cNvPr id="51" name="Овал 1"/>
           <p:cNvSpPr/>
           <p:nvPr/>
         </p:nvSpPr>
         <p:spPr>
           <a:xfrm>
             <a:off x="4122000" y="631080"/>
-            <a:ext cx="899640" cy="899640"/>
+            <a:ext cx="899280" cy="899280"/>
           </a:xfrm>
           <a:prstGeom prst="ellipse">
             <a:avLst/>
@@ -4013,25 +3586,26 @@
                   <a:srgbClr val="ffffff"/>
                 </a:solidFill>
                 <a:latin typeface="Calibri"/>
+                <a:ea typeface="DejaVu Sans"/>
               </a:rPr>
               <a:t>01</a:t>
             </a:r>
-            <a:endParaRPr b="0" lang="ru-RU" sz="1800" spc="-1" strike="noStrike">
-              <a:latin typeface="Arial"/>
-            </a:endParaRPr>
-          </a:p>
-        </p:txBody>
-      </p:sp>
-      <p:sp>
-        <p:nvSpPr>
-          <p:cNvPr id="53" name="Овал 23"/>
+            <a:endParaRPr b="0" lang="en-US" sz="1800" spc="-1" strike="noStrike">
+              <a:latin typeface="Arial"/>
+            </a:endParaRPr>
+          </a:p>
+        </p:txBody>
+      </p:sp>
+      <p:sp>
+        <p:nvSpPr>
+          <p:cNvPr id="52" name="Овал 23"/>
           <p:cNvSpPr/>
           <p:nvPr/>
         </p:nvSpPr>
         <p:spPr>
           <a:xfrm>
             <a:off x="4122000" y="2127600"/>
-            <a:ext cx="899640" cy="887760"/>
+            <a:ext cx="899280" cy="887400"/>
           </a:xfrm>
           <a:prstGeom prst="ellipse">
             <a:avLst/>
@@ -4074,25 +3648,26 @@
                   <a:srgbClr val="ffffff"/>
                 </a:solidFill>
                 <a:latin typeface="Calibri"/>
+                <a:ea typeface="DejaVu Sans"/>
               </a:rPr>
               <a:t>02</a:t>
             </a:r>
-            <a:endParaRPr b="0" lang="ru-RU" sz="1800" spc="-1" strike="noStrike">
-              <a:latin typeface="Arial"/>
-            </a:endParaRPr>
-          </a:p>
-        </p:txBody>
-      </p:sp>
-      <p:sp>
-        <p:nvSpPr>
-          <p:cNvPr id="54" name="Овал 29"/>
+            <a:endParaRPr b="0" lang="en-US" sz="1800" spc="-1" strike="noStrike">
+              <a:latin typeface="Arial"/>
+            </a:endParaRPr>
+          </a:p>
+        </p:txBody>
+      </p:sp>
+      <p:sp>
+        <p:nvSpPr>
+          <p:cNvPr id="53" name="Овал 29"/>
           <p:cNvSpPr/>
           <p:nvPr/>
         </p:nvSpPr>
         <p:spPr>
           <a:xfrm>
             <a:off x="4122000" y="3612240"/>
-            <a:ext cx="899640" cy="899640"/>
+            <a:ext cx="899280" cy="899280"/>
           </a:xfrm>
           <a:prstGeom prst="ellipse">
             <a:avLst/>
@@ -4135,25 +3710,26 @@
                   <a:srgbClr val="ffffff"/>
                 </a:solidFill>
                 <a:latin typeface="Calibri"/>
+                <a:ea typeface="DejaVu Sans"/>
               </a:rPr>
               <a:t>03</a:t>
             </a:r>
-            <a:endParaRPr b="0" lang="ru-RU" sz="1800" spc="-1" strike="noStrike">
-              <a:latin typeface="Arial"/>
-            </a:endParaRPr>
-          </a:p>
-        </p:txBody>
-      </p:sp>
-      <p:sp>
-        <p:nvSpPr>
-          <p:cNvPr id="55" name="TextBox 10"/>
+            <a:endParaRPr b="0" lang="en-US" sz="1800" spc="-1" strike="noStrike">
+              <a:latin typeface="Arial"/>
+            </a:endParaRPr>
+          </a:p>
+        </p:txBody>
+      </p:sp>
+      <p:sp>
+        <p:nvSpPr>
+          <p:cNvPr id="54" name="TextBox 10"/>
           <p:cNvSpPr/>
           <p:nvPr/>
         </p:nvSpPr>
         <p:spPr>
           <a:xfrm>
             <a:off x="5110920" y="489600"/>
-            <a:ext cx="3579120" cy="550800"/>
+            <a:ext cx="3578760" cy="550440"/>
           </a:xfrm>
           <a:prstGeom prst="rect">
             <a:avLst/>
@@ -4200,22 +3776,22 @@
               </a:rPr>
               <a:t>1</a:t>
             </a:r>
-            <a:endParaRPr b="0" lang="ru-RU" sz="1400" spc="-1" strike="noStrike">
-              <a:latin typeface="Arial"/>
-            </a:endParaRPr>
-          </a:p>
-        </p:txBody>
-      </p:sp>
-      <p:sp>
-        <p:nvSpPr>
-          <p:cNvPr id="56" name="TextBox 10"/>
+            <a:endParaRPr b="0" lang="en-US" sz="1400" spc="-1" strike="noStrike">
+              <a:latin typeface="Arial"/>
+            </a:endParaRPr>
+          </a:p>
+        </p:txBody>
+      </p:sp>
+      <p:sp>
+        <p:nvSpPr>
+          <p:cNvPr id="55" name="TextBox 10"/>
           <p:cNvSpPr/>
           <p:nvPr/>
         </p:nvSpPr>
         <p:spPr>
           <a:xfrm>
             <a:off x="5110920" y="1025280"/>
-            <a:ext cx="3579120" cy="789840"/>
+            <a:ext cx="3578760" cy="789480"/>
           </a:xfrm>
           <a:prstGeom prst="rect">
             <a:avLst/>
@@ -4262,22 +3838,22 @@
               </a:rPr>
               <a:t>1</a:t>
             </a:r>
-            <a:endParaRPr b="0" lang="ru-RU" sz="1100" spc="-1" strike="noStrike">
-              <a:latin typeface="Arial"/>
-            </a:endParaRPr>
-          </a:p>
-        </p:txBody>
-      </p:sp>
-      <p:sp>
-        <p:nvSpPr>
-          <p:cNvPr id="57" name="TextBox 10"/>
+            <a:endParaRPr b="0" lang="en-US" sz="1100" spc="-1" strike="noStrike">
+              <a:latin typeface="Arial"/>
+            </a:endParaRPr>
+          </a:p>
+        </p:txBody>
+      </p:sp>
+      <p:sp>
+        <p:nvSpPr>
+          <p:cNvPr id="56" name="TextBox 10"/>
           <p:cNvSpPr/>
           <p:nvPr/>
         </p:nvSpPr>
         <p:spPr>
           <a:xfrm>
             <a:off x="5107320" y="1985400"/>
-            <a:ext cx="3579120" cy="550800"/>
+            <a:ext cx="3578760" cy="550440"/>
           </a:xfrm>
           <a:prstGeom prst="rect">
             <a:avLst/>
@@ -4314,22 +3890,22 @@
               </a:rPr>
               <a:t>SUBTITLE2</a:t>
             </a:r>
-            <a:endParaRPr b="0" lang="ru-RU" sz="1400" spc="-1" strike="noStrike">
-              <a:latin typeface="Arial"/>
-            </a:endParaRPr>
-          </a:p>
-        </p:txBody>
-      </p:sp>
-      <p:sp>
-        <p:nvSpPr>
-          <p:cNvPr id="58" name="TextBox 10"/>
+            <a:endParaRPr b="0" lang="en-US" sz="1400" spc="-1" strike="noStrike">
+              <a:latin typeface="Arial"/>
+            </a:endParaRPr>
+          </a:p>
+        </p:txBody>
+      </p:sp>
+      <p:sp>
+        <p:nvSpPr>
+          <p:cNvPr id="57" name="TextBox 10"/>
           <p:cNvSpPr/>
           <p:nvPr/>
         </p:nvSpPr>
         <p:spPr>
           <a:xfrm>
             <a:off x="5107320" y="2517840"/>
-            <a:ext cx="3579120" cy="843480"/>
+            <a:ext cx="3578760" cy="843120"/>
           </a:xfrm>
           <a:prstGeom prst="rect">
             <a:avLst/>
@@ -4376,22 +3952,22 @@
               </a:rPr>
               <a:t>2</a:t>
             </a:r>
-            <a:endParaRPr b="0" lang="ru-RU" sz="1100" spc="-1" strike="noStrike">
-              <a:latin typeface="Arial"/>
-            </a:endParaRPr>
-          </a:p>
-        </p:txBody>
-      </p:sp>
-      <p:sp>
-        <p:nvSpPr>
-          <p:cNvPr id="59" name="TextBox 10"/>
+            <a:endParaRPr b="0" lang="en-US" sz="1100" spc="-1" strike="noStrike">
+              <a:latin typeface="Arial"/>
+            </a:endParaRPr>
+          </a:p>
+        </p:txBody>
+      </p:sp>
+      <p:sp>
+        <p:nvSpPr>
+          <p:cNvPr id="58" name="TextBox 10"/>
           <p:cNvSpPr/>
           <p:nvPr/>
         </p:nvSpPr>
         <p:spPr>
           <a:xfrm>
             <a:off x="5107320" y="3470760"/>
-            <a:ext cx="3579120" cy="550800"/>
+            <a:ext cx="3578760" cy="550440"/>
           </a:xfrm>
           <a:prstGeom prst="rect">
             <a:avLst/>
@@ -4428,22 +4004,22 @@
               </a:rPr>
               <a:t>SUBTITLE3</a:t>
             </a:r>
-            <a:endParaRPr b="0" lang="ru-RU" sz="1400" spc="-1" strike="noStrike">
-              <a:latin typeface="Arial"/>
-            </a:endParaRPr>
-          </a:p>
-        </p:txBody>
-      </p:sp>
-      <p:sp>
-        <p:nvSpPr>
-          <p:cNvPr id="60" name="TextBox 10"/>
+            <a:endParaRPr b="0" lang="en-US" sz="1400" spc="-1" strike="noStrike">
+              <a:latin typeface="Arial"/>
+            </a:endParaRPr>
+          </a:p>
+        </p:txBody>
+      </p:sp>
+      <p:sp>
+        <p:nvSpPr>
+          <p:cNvPr id="59" name="TextBox 10"/>
           <p:cNvSpPr/>
           <p:nvPr/>
         </p:nvSpPr>
         <p:spPr>
           <a:xfrm>
             <a:off x="5107320" y="4003560"/>
-            <a:ext cx="3579120" cy="794880"/>
+            <a:ext cx="3578760" cy="794520"/>
           </a:xfrm>
           <a:prstGeom prst="rect">
             <a:avLst/>
@@ -4490,22 +4066,22 @@
               </a:rPr>
               <a:t>3</a:t>
             </a:r>
-            <a:endParaRPr b="0" lang="ru-RU" sz="1100" spc="-1" strike="noStrike">
-              <a:latin typeface="Arial"/>
-            </a:endParaRPr>
-          </a:p>
-        </p:txBody>
-      </p:sp>
-      <p:sp>
-        <p:nvSpPr>
-          <p:cNvPr id="61" name="TextBox 13"/>
+            <a:endParaRPr b="0" lang="en-US" sz="1100" spc="-1" strike="noStrike">
+              <a:latin typeface="Arial"/>
+            </a:endParaRPr>
+          </a:p>
+        </p:txBody>
+      </p:sp>
+      <p:sp>
+        <p:nvSpPr>
+          <p:cNvPr id="60" name="TextBox 13"/>
           <p:cNvSpPr/>
           <p:nvPr/>
         </p:nvSpPr>
         <p:spPr>
           <a:xfrm>
             <a:off x="165960" y="200880"/>
-            <a:ext cx="3148200" cy="1842120"/>
+            <a:ext cx="3147840" cy="1841760"/>
           </a:xfrm>
           <a:prstGeom prst="rect">
             <a:avLst/>
@@ -4538,10 +4114,11 @@
                   <a:srgbClr val="ffffff"/>
                 </a:solidFill>
                 <a:latin typeface="Arial"/>
+                <a:ea typeface="DejaVu Sans"/>
               </a:rPr>
               <a:t>TITLE</a:t>
             </a:r>
-            <a:endParaRPr b="0" lang="ru-RU" sz="2200" spc="-1" strike="noStrike">
+            <a:endParaRPr b="0" lang="en-US" sz="2200" spc="-1" strike="noStrike">
               <a:latin typeface="Arial"/>
             </a:endParaRPr>
           </a:p>
@@ -4586,14 +4163,14 @@
       </p:grpSpPr>
       <p:sp>
         <p:nvSpPr>
-          <p:cNvPr id="62" name="Прямоугольник со скругленными углами 3"/>
+          <p:cNvPr id="61" name="Прямоугольник со скругленными углами 3"/>
           <p:cNvSpPr/>
           <p:nvPr/>
         </p:nvSpPr>
         <p:spPr>
           <a:xfrm>
             <a:off x="0" y="0"/>
-            <a:ext cx="9143640" cy="1961640"/>
+            <a:ext cx="9143280" cy="1961280"/>
           </a:xfrm>
           <a:prstGeom prst="roundRect">
             <a:avLst>
@@ -4644,22 +4221,22 @@
               </a:rPr>
               <a:t>PIC</a:t>
             </a:r>
-            <a:endParaRPr b="0" lang="ru-RU" sz="1800" spc="-1" strike="noStrike">
-              <a:latin typeface="Arial"/>
-            </a:endParaRPr>
-          </a:p>
-        </p:txBody>
-      </p:sp>
-      <p:sp>
-        <p:nvSpPr>
-          <p:cNvPr id="63" name="TextBox 10"/>
+            <a:endParaRPr b="0" lang="en-US" sz="1800" spc="-1" strike="noStrike">
+              <a:latin typeface="Arial"/>
+            </a:endParaRPr>
+          </a:p>
+        </p:txBody>
+      </p:sp>
+      <p:sp>
+        <p:nvSpPr>
+          <p:cNvPr id="62" name="TextBox 10"/>
           <p:cNvSpPr/>
           <p:nvPr/>
         </p:nvSpPr>
         <p:spPr>
           <a:xfrm>
             <a:off x="384840" y="2571840"/>
-            <a:ext cx="2665080" cy="713880"/>
+            <a:ext cx="2664720" cy="713520"/>
           </a:xfrm>
           <a:prstGeom prst="rect">
             <a:avLst/>
@@ -4696,22 +4273,22 @@
               </a:rPr>
               <a:t>SUBTITLE1</a:t>
             </a:r>
-            <a:endParaRPr b="0" lang="ru-RU" sz="1400" spc="-1" strike="noStrike">
-              <a:latin typeface="Arial"/>
-            </a:endParaRPr>
-          </a:p>
-        </p:txBody>
-      </p:sp>
-      <p:sp>
-        <p:nvSpPr>
-          <p:cNvPr id="64" name="TextBox 10"/>
+            <a:endParaRPr b="0" lang="en-US" sz="1400" spc="-1" strike="noStrike">
+              <a:latin typeface="Arial"/>
+            </a:endParaRPr>
+          </a:p>
+        </p:txBody>
+      </p:sp>
+      <p:sp>
+        <p:nvSpPr>
+          <p:cNvPr id="63" name="TextBox 10"/>
           <p:cNvSpPr/>
           <p:nvPr/>
         </p:nvSpPr>
         <p:spPr>
           <a:xfrm>
             <a:off x="384840" y="3356280"/>
-            <a:ext cx="2665080" cy="1565280"/>
+            <a:ext cx="2664720" cy="1564920"/>
           </a:xfrm>
           <a:prstGeom prst="rect">
             <a:avLst/>
@@ -4758,22 +4335,22 @@
               </a:rPr>
               <a:t>1</a:t>
             </a:r>
-            <a:endParaRPr b="0" lang="ru-RU" sz="1100" spc="-1" strike="noStrike">
-              <a:latin typeface="Arial"/>
-            </a:endParaRPr>
-          </a:p>
-        </p:txBody>
-      </p:sp>
-      <p:sp>
-        <p:nvSpPr>
-          <p:cNvPr id="65" name="TextBox 10"/>
+            <a:endParaRPr b="0" lang="en-US" sz="1100" spc="-1" strike="noStrike">
+              <a:latin typeface="Arial"/>
+            </a:endParaRPr>
+          </a:p>
+        </p:txBody>
+      </p:sp>
+      <p:sp>
+        <p:nvSpPr>
+          <p:cNvPr id="64" name="TextBox 10"/>
           <p:cNvSpPr/>
           <p:nvPr/>
         </p:nvSpPr>
         <p:spPr>
           <a:xfrm>
             <a:off x="3239280" y="2571840"/>
-            <a:ext cx="2665080" cy="713880"/>
+            <a:ext cx="2664720" cy="713520"/>
           </a:xfrm>
           <a:prstGeom prst="rect">
             <a:avLst/>
@@ -4810,22 +4387,22 @@
               </a:rPr>
               <a:t>SUBTITLE2</a:t>
             </a:r>
-            <a:endParaRPr b="0" lang="ru-RU" sz="1400" spc="-1" strike="noStrike">
-              <a:latin typeface="Arial"/>
-            </a:endParaRPr>
-          </a:p>
-        </p:txBody>
-      </p:sp>
-      <p:sp>
-        <p:nvSpPr>
-          <p:cNvPr id="66" name="TextBox 10"/>
+            <a:endParaRPr b="0" lang="en-US" sz="1400" spc="-1" strike="noStrike">
+              <a:latin typeface="Arial"/>
+            </a:endParaRPr>
+          </a:p>
+        </p:txBody>
+      </p:sp>
+      <p:sp>
+        <p:nvSpPr>
+          <p:cNvPr id="65" name="TextBox 10"/>
           <p:cNvSpPr/>
           <p:nvPr/>
         </p:nvSpPr>
         <p:spPr>
           <a:xfrm>
             <a:off x="3239280" y="3356280"/>
-            <a:ext cx="2665080" cy="1565280"/>
+            <a:ext cx="2664720" cy="1564920"/>
           </a:xfrm>
           <a:prstGeom prst="rect">
             <a:avLst/>
@@ -4872,22 +4449,22 @@
               </a:rPr>
               <a:t>2</a:t>
             </a:r>
-            <a:endParaRPr b="0" lang="ru-RU" sz="1100" spc="-1" strike="noStrike">
-              <a:latin typeface="Arial"/>
-            </a:endParaRPr>
-          </a:p>
-        </p:txBody>
-      </p:sp>
-      <p:sp>
-        <p:nvSpPr>
-          <p:cNvPr id="67" name="TextBox 10"/>
+            <a:endParaRPr b="0" lang="en-US" sz="1100" spc="-1" strike="noStrike">
+              <a:latin typeface="Arial"/>
+            </a:endParaRPr>
+          </a:p>
+        </p:txBody>
+      </p:sp>
+      <p:sp>
+        <p:nvSpPr>
+          <p:cNvPr id="66" name="TextBox 10"/>
           <p:cNvSpPr/>
           <p:nvPr/>
         </p:nvSpPr>
         <p:spPr>
           <a:xfrm>
             <a:off x="6093720" y="2571840"/>
-            <a:ext cx="2665080" cy="713880"/>
+            <a:ext cx="2664720" cy="713520"/>
           </a:xfrm>
           <a:prstGeom prst="rect">
             <a:avLst/>
@@ -4924,22 +4501,22 @@
               </a:rPr>
               <a:t>SUBTITLE3</a:t>
             </a:r>
-            <a:endParaRPr b="0" lang="ru-RU" sz="1400" spc="-1" strike="noStrike">
-              <a:latin typeface="Arial"/>
-            </a:endParaRPr>
-          </a:p>
-        </p:txBody>
-      </p:sp>
-      <p:sp>
-        <p:nvSpPr>
-          <p:cNvPr id="68" name="TextBox 10"/>
+            <a:endParaRPr b="0" lang="en-US" sz="1400" spc="-1" strike="noStrike">
+              <a:latin typeface="Arial"/>
+            </a:endParaRPr>
+          </a:p>
+        </p:txBody>
+      </p:sp>
+      <p:sp>
+        <p:nvSpPr>
+          <p:cNvPr id="67" name="TextBox 10"/>
           <p:cNvSpPr/>
           <p:nvPr/>
         </p:nvSpPr>
         <p:spPr>
           <a:xfrm>
             <a:off x="6093720" y="3356280"/>
-            <a:ext cx="2665080" cy="1565280"/>
+            <a:ext cx="2664720" cy="1564920"/>
           </a:xfrm>
           <a:prstGeom prst="rect">
             <a:avLst/>
@@ -4986,22 +4563,22 @@
               </a:rPr>
               <a:t>3</a:t>
             </a:r>
-            <a:endParaRPr b="0" lang="ru-RU" sz="1100" spc="-1" strike="noStrike">
-              <a:latin typeface="Arial"/>
-            </a:endParaRPr>
-          </a:p>
-        </p:txBody>
-      </p:sp>
-      <p:sp>
-        <p:nvSpPr>
-          <p:cNvPr id="69" name="TextBox 9"/>
+            <a:endParaRPr b="0" lang="en-US" sz="1100" spc="-1" strike="noStrike">
+              <a:latin typeface="Arial"/>
+            </a:endParaRPr>
+          </a:p>
+        </p:txBody>
+      </p:sp>
+      <p:sp>
+        <p:nvSpPr>
+          <p:cNvPr id="68" name="TextBox 9"/>
           <p:cNvSpPr/>
           <p:nvPr/>
         </p:nvSpPr>
         <p:spPr>
           <a:xfrm>
             <a:off x="384840" y="2178000"/>
-            <a:ext cx="8465760" cy="480960"/>
+            <a:ext cx="8465400" cy="480600"/>
           </a:xfrm>
           <a:prstGeom prst="rect">
             <a:avLst/>
@@ -5034,10 +4611,11 @@
                   <a:srgbClr val="ffffff"/>
                 </a:solidFill>
                 <a:latin typeface="Arial"/>
+                <a:ea typeface="DejaVu Sans"/>
               </a:rPr>
               <a:t>TITLE</a:t>
             </a:r>
-            <a:endParaRPr b="0" lang="ru-RU" sz="2200" spc="-1" strike="noStrike">
+            <a:endParaRPr b="0" lang="en-US" sz="2200" spc="-1" strike="noStrike">
               <a:latin typeface="Arial"/>
             </a:endParaRPr>
           </a:p>
@@ -5082,14 +4660,14 @@
       </p:grpSpPr>
       <p:sp>
         <p:nvSpPr>
-          <p:cNvPr id="70" name="Прямоугольник: скругленные углы 15"/>
+          <p:cNvPr id="69" name="Прямоугольник: скругленные углы 15"/>
           <p:cNvSpPr/>
           <p:nvPr/>
         </p:nvSpPr>
         <p:spPr>
           <a:xfrm>
             <a:off x="4636440" y="250200"/>
-            <a:ext cx="4198320" cy="4625280"/>
+            <a:ext cx="4197960" cy="4624920"/>
           </a:xfrm>
           <a:prstGeom prst="roundRect">
             <a:avLst>
@@ -5136,25 +4714,26 @@
                   <a:srgbClr val="ffffff"/>
                 </a:solidFill>
                 <a:latin typeface="Calibri"/>
+                <a:ea typeface="DejaVu Sans"/>
               </a:rPr>
               <a:t>PIC</a:t>
             </a:r>
-            <a:endParaRPr b="0" lang="ru-RU" sz="1800" spc="-1" strike="noStrike">
-              <a:latin typeface="Arial"/>
-            </a:endParaRPr>
-          </a:p>
-        </p:txBody>
-      </p:sp>
-      <p:sp>
-        <p:nvSpPr>
-          <p:cNvPr id="71" name="Прямоугольник: скругленные углы 16"/>
+            <a:endParaRPr b="0" lang="en-US" sz="1800" spc="-1" strike="noStrike">
+              <a:latin typeface="Arial"/>
+            </a:endParaRPr>
+          </a:p>
+        </p:txBody>
+      </p:sp>
+      <p:sp>
+        <p:nvSpPr>
+          <p:cNvPr id="70" name="Прямоугольник: скругленные углы 16"/>
           <p:cNvSpPr/>
           <p:nvPr/>
         </p:nvSpPr>
         <p:spPr>
           <a:xfrm>
             <a:off x="329400" y="257040"/>
-            <a:ext cx="4198320" cy="4625280"/>
+            <a:ext cx="4197960" cy="4624920"/>
           </a:xfrm>
           <a:prstGeom prst="roundRect">
             <a:avLst>
@@ -5188,14 +4767,14 @@
       </p:sp>
       <p:sp>
         <p:nvSpPr>
-          <p:cNvPr id="72" name="Овал 9"/>
+          <p:cNvPr id="71" name="Овал 9"/>
           <p:cNvSpPr/>
           <p:nvPr/>
         </p:nvSpPr>
         <p:spPr>
           <a:xfrm>
             <a:off x="4272120" y="1193040"/>
-            <a:ext cx="635400" cy="635400"/>
+            <a:ext cx="635040" cy="635040"/>
           </a:xfrm>
           <a:prstGeom prst="ellipse">
             <a:avLst/>
@@ -5224,14 +4803,14 @@
       </p:sp>
       <p:sp>
         <p:nvSpPr>
-          <p:cNvPr id="73" name="TextBox 10"/>
+          <p:cNvPr id="72" name="TextBox 10"/>
           <p:cNvSpPr/>
           <p:nvPr/>
         </p:nvSpPr>
         <p:spPr>
           <a:xfrm>
             <a:off x="581760" y="828720"/>
-            <a:ext cx="3693600" cy="550800"/>
+            <a:ext cx="3693240" cy="550440"/>
           </a:xfrm>
           <a:prstGeom prst="rect">
             <a:avLst/>
@@ -5278,22 +4857,22 @@
               </a:rPr>
               <a:t>1</a:t>
             </a:r>
-            <a:endParaRPr b="0" lang="ru-RU" sz="1400" spc="-1" strike="noStrike">
-              <a:latin typeface="Arial"/>
-            </a:endParaRPr>
-          </a:p>
-        </p:txBody>
-      </p:sp>
-      <p:sp>
-        <p:nvSpPr>
-          <p:cNvPr id="74" name="TextBox 10"/>
+            <a:endParaRPr b="0" lang="en-US" sz="1400" spc="-1" strike="noStrike">
+              <a:latin typeface="Arial"/>
+            </a:endParaRPr>
+          </a:p>
+        </p:txBody>
+      </p:sp>
+      <p:sp>
+        <p:nvSpPr>
+          <p:cNvPr id="73" name="TextBox 10"/>
           <p:cNvSpPr/>
           <p:nvPr/>
         </p:nvSpPr>
         <p:spPr>
           <a:xfrm>
             <a:off x="581760" y="1364400"/>
-            <a:ext cx="3693600" cy="789840"/>
+            <a:ext cx="3693240" cy="789480"/>
           </a:xfrm>
           <a:prstGeom prst="rect">
             <a:avLst/>
@@ -5340,22 +4919,22 @@
               </a:rPr>
               <a:t>1</a:t>
             </a:r>
-            <a:endParaRPr b="0" lang="ru-RU" sz="1100" spc="-1" strike="noStrike">
-              <a:latin typeface="Arial"/>
-            </a:endParaRPr>
-          </a:p>
-        </p:txBody>
-      </p:sp>
-      <p:sp>
-        <p:nvSpPr>
-          <p:cNvPr id="75" name="TextBox 10"/>
+            <a:endParaRPr b="0" lang="en-US" sz="1100" spc="-1" strike="noStrike">
+              <a:latin typeface="Arial"/>
+            </a:endParaRPr>
+          </a:p>
+        </p:txBody>
+      </p:sp>
+      <p:sp>
+        <p:nvSpPr>
+          <p:cNvPr id="74" name="TextBox 10"/>
           <p:cNvSpPr/>
           <p:nvPr/>
         </p:nvSpPr>
         <p:spPr>
           <a:xfrm>
             <a:off x="578160" y="2154600"/>
-            <a:ext cx="3693600" cy="550800"/>
+            <a:ext cx="3693240" cy="550440"/>
           </a:xfrm>
           <a:prstGeom prst="rect">
             <a:avLst/>
@@ -5392,22 +4971,22 @@
               </a:rPr>
               <a:t>SUBTITLE2</a:t>
             </a:r>
-            <a:endParaRPr b="0" lang="ru-RU" sz="1400" spc="-1" strike="noStrike">
-              <a:latin typeface="Arial"/>
-            </a:endParaRPr>
-          </a:p>
-        </p:txBody>
-      </p:sp>
-      <p:sp>
-        <p:nvSpPr>
-          <p:cNvPr id="76" name="TextBox 10"/>
+            <a:endParaRPr b="0" lang="en-US" sz="1400" spc="-1" strike="noStrike">
+              <a:latin typeface="Arial"/>
+            </a:endParaRPr>
+          </a:p>
+        </p:txBody>
+      </p:sp>
+      <p:sp>
+        <p:nvSpPr>
+          <p:cNvPr id="75" name="TextBox 10"/>
           <p:cNvSpPr/>
           <p:nvPr/>
         </p:nvSpPr>
         <p:spPr>
           <a:xfrm>
             <a:off x="578160" y="2687040"/>
-            <a:ext cx="3693600" cy="843480"/>
+            <a:ext cx="3693240" cy="843120"/>
           </a:xfrm>
           <a:prstGeom prst="rect">
             <a:avLst/>
@@ -5454,22 +5033,22 @@
               </a:rPr>
               <a:t>2</a:t>
             </a:r>
-            <a:endParaRPr b="0" lang="ru-RU" sz="1100" spc="-1" strike="noStrike">
-              <a:latin typeface="Arial"/>
-            </a:endParaRPr>
-          </a:p>
-        </p:txBody>
-      </p:sp>
-      <p:sp>
-        <p:nvSpPr>
-          <p:cNvPr id="77" name="TextBox 10"/>
+            <a:endParaRPr b="0" lang="en-US" sz="1100" spc="-1" strike="noStrike">
+              <a:latin typeface="Arial"/>
+            </a:endParaRPr>
+          </a:p>
+        </p:txBody>
+      </p:sp>
+      <p:sp>
+        <p:nvSpPr>
+          <p:cNvPr id="76" name="TextBox 10"/>
           <p:cNvSpPr/>
           <p:nvPr/>
         </p:nvSpPr>
         <p:spPr>
           <a:xfrm>
             <a:off x="578160" y="3482280"/>
-            <a:ext cx="3693600" cy="550800"/>
+            <a:ext cx="3693240" cy="550440"/>
           </a:xfrm>
           <a:prstGeom prst="rect">
             <a:avLst/>
@@ -5506,22 +5085,22 @@
               </a:rPr>
               <a:t>SUBTITLE3</a:t>
             </a:r>
-            <a:endParaRPr b="0" lang="ru-RU" sz="1400" spc="-1" strike="noStrike">
-              <a:latin typeface="Arial"/>
-            </a:endParaRPr>
-          </a:p>
-        </p:txBody>
-      </p:sp>
-      <p:sp>
-        <p:nvSpPr>
-          <p:cNvPr id="78" name="TextBox 10"/>
+            <a:endParaRPr b="0" lang="en-US" sz="1400" spc="-1" strike="noStrike">
+              <a:latin typeface="Arial"/>
+            </a:endParaRPr>
+          </a:p>
+        </p:txBody>
+      </p:sp>
+      <p:sp>
+        <p:nvSpPr>
+          <p:cNvPr id="77" name="TextBox 10"/>
           <p:cNvSpPr/>
           <p:nvPr/>
         </p:nvSpPr>
         <p:spPr>
           <a:xfrm>
             <a:off x="578160" y="4015080"/>
-            <a:ext cx="3693600" cy="794880"/>
+            <a:ext cx="3693240" cy="794520"/>
           </a:xfrm>
           <a:prstGeom prst="rect">
             <a:avLst/>
@@ -5568,22 +5147,22 @@
               </a:rPr>
               <a:t>3</a:t>
             </a:r>
-            <a:endParaRPr b="0" lang="ru-RU" sz="1100" spc="-1" strike="noStrike">
-              <a:latin typeface="Arial"/>
-            </a:endParaRPr>
-          </a:p>
-        </p:txBody>
-      </p:sp>
-      <p:sp>
-        <p:nvSpPr>
-          <p:cNvPr id="79" name="TextBox 30"/>
+            <a:endParaRPr b="0" lang="en-US" sz="1100" spc="-1" strike="noStrike">
+              <a:latin typeface="Arial"/>
+            </a:endParaRPr>
+          </a:p>
+        </p:txBody>
+      </p:sp>
+      <p:sp>
+        <p:nvSpPr>
+          <p:cNvPr id="78" name="TextBox 30"/>
           <p:cNvSpPr/>
           <p:nvPr/>
         </p:nvSpPr>
         <p:spPr>
           <a:xfrm>
             <a:off x="553680" y="352440"/>
-            <a:ext cx="3803760" cy="789840"/>
+            <a:ext cx="3803400" cy="789480"/>
           </a:xfrm>
           <a:prstGeom prst="rect">
             <a:avLst/>
@@ -5616,10 +5195,11 @@
                   <a:srgbClr val="ffffff"/>
                 </a:solidFill>
                 <a:latin typeface="Arial"/>
+                <a:ea typeface="DejaVu Sans"/>
               </a:rPr>
               <a:t>TITLE</a:t>
             </a:r>
-            <a:endParaRPr b="0" lang="ru-RU" sz="2200" spc="-1" strike="noStrike">
+            <a:endParaRPr b="0" lang="en-US" sz="2200" spc="-1" strike="noStrike">
               <a:latin typeface="Arial"/>
             </a:endParaRPr>
           </a:p>
@@ -5664,14 +5244,14 @@
       </p:grpSpPr>
       <p:sp>
         <p:nvSpPr>
-          <p:cNvPr id="80" name="TextBox 20"/>
+          <p:cNvPr id="79" name="TextBox 20"/>
           <p:cNvSpPr/>
           <p:nvPr/>
         </p:nvSpPr>
         <p:spPr>
           <a:xfrm>
             <a:off x="516960" y="411840"/>
-            <a:ext cx="8465760" cy="480960"/>
+            <a:ext cx="8465400" cy="480600"/>
           </a:xfrm>
           <a:prstGeom prst="rect">
             <a:avLst/>
@@ -5704,25 +5284,26 @@
                   <a:srgbClr val="ffffff"/>
                 </a:solidFill>
                 <a:latin typeface="Arial"/>
+                <a:ea typeface="DejaVu Sans"/>
               </a:rPr>
               <a:t>TITLE</a:t>
             </a:r>
-            <a:endParaRPr b="0" lang="ru-RU" sz="2200" spc="-1" strike="noStrike">
-              <a:latin typeface="Arial"/>
-            </a:endParaRPr>
-          </a:p>
-        </p:txBody>
-      </p:sp>
-      <p:sp>
-        <p:nvSpPr>
-          <p:cNvPr id="81" name="Прямоугольник со скругленными углами 3"/>
+            <a:endParaRPr b="0" lang="en-US" sz="2200" spc="-1" strike="noStrike">
+              <a:latin typeface="Arial"/>
+            </a:endParaRPr>
+          </a:p>
+        </p:txBody>
+      </p:sp>
+      <p:sp>
+        <p:nvSpPr>
+          <p:cNvPr id="80" name="Прямоугольник со скругленными углами 3"/>
           <p:cNvSpPr/>
           <p:nvPr/>
         </p:nvSpPr>
         <p:spPr>
           <a:xfrm>
             <a:off x="456480" y="1406160"/>
-            <a:ext cx="2300760" cy="1440000"/>
+            <a:ext cx="2300400" cy="1439640"/>
           </a:xfrm>
           <a:prstGeom prst="roundRect">
             <a:avLst>
@@ -5773,22 +5354,22 @@
               </a:rPr>
               <a:t>PIC</a:t>
             </a:r>
-            <a:endParaRPr b="0" lang="ru-RU" sz="1800" spc="-1" strike="noStrike">
-              <a:latin typeface="Arial"/>
-            </a:endParaRPr>
-          </a:p>
-        </p:txBody>
-      </p:sp>
-      <p:sp>
-        <p:nvSpPr>
-          <p:cNvPr id="82" name="TextBox 10"/>
+            <a:endParaRPr b="0" lang="en-US" sz="1800" spc="-1" strike="noStrike">
+              <a:latin typeface="Arial"/>
+            </a:endParaRPr>
+          </a:p>
+        </p:txBody>
+      </p:sp>
+      <p:sp>
+        <p:nvSpPr>
+          <p:cNvPr id="81" name="TextBox 10"/>
           <p:cNvSpPr/>
           <p:nvPr/>
         </p:nvSpPr>
         <p:spPr>
           <a:xfrm>
             <a:off x="384840" y="3013560"/>
-            <a:ext cx="2429280" cy="713880"/>
+            <a:ext cx="2428920" cy="713520"/>
           </a:xfrm>
           <a:prstGeom prst="rect">
             <a:avLst/>
@@ -5825,22 +5406,22 @@
               </a:rPr>
               <a:t>SUBTITLE1</a:t>
             </a:r>
-            <a:endParaRPr b="0" lang="ru-RU" sz="1400" spc="-1" strike="noStrike">
-              <a:latin typeface="Arial"/>
-            </a:endParaRPr>
-          </a:p>
-        </p:txBody>
-      </p:sp>
-      <p:sp>
-        <p:nvSpPr>
-          <p:cNvPr id="83" name="TextBox 10"/>
+            <a:endParaRPr b="0" lang="en-US" sz="1400" spc="-1" strike="noStrike">
+              <a:latin typeface="Arial"/>
+            </a:endParaRPr>
+          </a:p>
+        </p:txBody>
+      </p:sp>
+      <p:sp>
+        <p:nvSpPr>
+          <p:cNvPr id="82" name="TextBox 10"/>
           <p:cNvSpPr/>
           <p:nvPr/>
         </p:nvSpPr>
         <p:spPr>
           <a:xfrm>
             <a:off x="384840" y="3798000"/>
-            <a:ext cx="2429280" cy="1037880"/>
+            <a:ext cx="2428920" cy="1037520"/>
           </a:xfrm>
           <a:prstGeom prst="rect">
             <a:avLst/>
@@ -5887,22 +5468,22 @@
               </a:rPr>
               <a:t>1</a:t>
             </a:r>
-            <a:endParaRPr b="0" lang="ru-RU" sz="1100" spc="-1" strike="noStrike">
-              <a:latin typeface="Arial"/>
-            </a:endParaRPr>
-          </a:p>
-        </p:txBody>
-      </p:sp>
-      <p:sp>
-        <p:nvSpPr>
-          <p:cNvPr id="84" name="Прямоугольник: скругленные углы 1"/>
+            <a:endParaRPr b="0" lang="en-US" sz="1100" spc="-1" strike="noStrike">
+              <a:latin typeface="Arial"/>
+            </a:endParaRPr>
+          </a:p>
+        </p:txBody>
+      </p:sp>
+      <p:sp>
+        <p:nvSpPr>
+          <p:cNvPr id="83" name="Прямоугольник: скругленные углы 1"/>
           <p:cNvSpPr/>
           <p:nvPr/>
         </p:nvSpPr>
         <p:spPr>
           <a:xfrm>
             <a:off x="328680" y="228600"/>
-            <a:ext cx="8501400" cy="813960"/>
+            <a:ext cx="8501040" cy="813600"/>
           </a:xfrm>
           <a:prstGeom prst="roundRect">
             <a:avLst>
@@ -5933,14 +5514,14 @@
       </p:sp>
       <p:sp>
         <p:nvSpPr>
-          <p:cNvPr id="85" name="Прямоугольник: скругленные углы 10"/>
+          <p:cNvPr id="84" name="Прямоугольник: скругленные углы 10"/>
           <p:cNvSpPr/>
           <p:nvPr/>
         </p:nvSpPr>
         <p:spPr>
           <a:xfrm>
             <a:off x="328680" y="1279080"/>
-            <a:ext cx="2557080" cy="3642840"/>
+            <a:ext cx="2556720" cy="3642480"/>
           </a:xfrm>
           <a:prstGeom prst="roundRect">
             <a:avLst>
@@ -5971,14 +5552,14 @@
       </p:sp>
       <p:sp>
         <p:nvSpPr>
-          <p:cNvPr id="86" name="Прямоугольник со скругленными углами 3"/>
+          <p:cNvPr id="85" name="Прямоугольник со скругленными углами 3"/>
           <p:cNvSpPr/>
           <p:nvPr/>
         </p:nvSpPr>
         <p:spPr>
           <a:xfrm>
             <a:off x="3421080" y="1398960"/>
-            <a:ext cx="2300760" cy="1440000"/>
+            <a:ext cx="2300400" cy="1439640"/>
           </a:xfrm>
           <a:prstGeom prst="roundRect">
             <a:avLst>
@@ -6029,22 +5610,22 @@
               </a:rPr>
               <a:t>PIC</a:t>
             </a:r>
-            <a:endParaRPr b="0" lang="ru-RU" sz="1800" spc="-1" strike="noStrike">
-              <a:latin typeface="Arial"/>
-            </a:endParaRPr>
-          </a:p>
-        </p:txBody>
-      </p:sp>
-      <p:sp>
-        <p:nvSpPr>
-          <p:cNvPr id="87" name="TextBox 10"/>
+            <a:endParaRPr b="0" lang="en-US" sz="1800" spc="-1" strike="noStrike">
+              <a:latin typeface="Arial"/>
+            </a:endParaRPr>
+          </a:p>
+        </p:txBody>
+      </p:sp>
+      <p:sp>
+        <p:nvSpPr>
+          <p:cNvPr id="86" name="TextBox 10"/>
           <p:cNvSpPr/>
           <p:nvPr/>
         </p:nvSpPr>
         <p:spPr>
           <a:xfrm>
             <a:off x="3349440" y="3013560"/>
-            <a:ext cx="2429280" cy="713880"/>
+            <a:ext cx="2428920" cy="713520"/>
           </a:xfrm>
           <a:prstGeom prst="rect">
             <a:avLst/>
@@ -6091,22 +5672,22 @@
               </a:rPr>
               <a:t>2</a:t>
             </a:r>
-            <a:endParaRPr b="0" lang="ru-RU" sz="1400" spc="-1" strike="noStrike">
-              <a:latin typeface="Arial"/>
-            </a:endParaRPr>
-          </a:p>
-        </p:txBody>
-      </p:sp>
-      <p:sp>
-        <p:nvSpPr>
-          <p:cNvPr id="88" name="TextBox 10"/>
+            <a:endParaRPr b="0" lang="en-US" sz="1400" spc="-1" strike="noStrike">
+              <a:latin typeface="Arial"/>
+            </a:endParaRPr>
+          </a:p>
+        </p:txBody>
+      </p:sp>
+      <p:sp>
+        <p:nvSpPr>
+          <p:cNvPr id="87" name="TextBox 10"/>
           <p:cNvSpPr/>
           <p:nvPr/>
         </p:nvSpPr>
         <p:spPr>
           <a:xfrm>
             <a:off x="3349440" y="3798000"/>
-            <a:ext cx="2429280" cy="1037880"/>
+            <a:ext cx="2428920" cy="1037520"/>
           </a:xfrm>
           <a:prstGeom prst="rect">
             <a:avLst/>
@@ -6153,22 +5734,22 @@
               </a:rPr>
               <a:t>2</a:t>
             </a:r>
-            <a:endParaRPr b="0" lang="ru-RU" sz="1100" spc="-1" strike="noStrike">
-              <a:latin typeface="Arial"/>
-            </a:endParaRPr>
-          </a:p>
-        </p:txBody>
-      </p:sp>
-      <p:sp>
-        <p:nvSpPr>
-          <p:cNvPr id="89" name="Прямоугольник: скругленные углы 14"/>
+            <a:endParaRPr b="0" lang="en-US" sz="1100" spc="-1" strike="noStrike">
+              <a:latin typeface="Arial"/>
+            </a:endParaRPr>
+          </a:p>
+        </p:txBody>
+      </p:sp>
+      <p:sp>
+        <p:nvSpPr>
+          <p:cNvPr id="88" name="Прямоугольник: скругленные углы 14"/>
           <p:cNvSpPr/>
           <p:nvPr/>
         </p:nvSpPr>
         <p:spPr>
           <a:xfrm>
             <a:off x="3293280" y="1271880"/>
-            <a:ext cx="2557080" cy="3642840"/>
+            <a:ext cx="2556720" cy="3642480"/>
           </a:xfrm>
           <a:prstGeom prst="roundRect">
             <a:avLst>
@@ -6199,14 +5780,14 @@
       </p:sp>
       <p:sp>
         <p:nvSpPr>
-          <p:cNvPr id="90" name="Прямоугольник со скругленными углами 3"/>
+          <p:cNvPr id="89" name="Прямоугольник со скругленными углами 3"/>
           <p:cNvSpPr/>
           <p:nvPr/>
         </p:nvSpPr>
         <p:spPr>
           <a:xfrm>
             <a:off x="6400800" y="1379520"/>
-            <a:ext cx="2300760" cy="1440000"/>
+            <a:ext cx="2300400" cy="1439640"/>
           </a:xfrm>
           <a:prstGeom prst="roundRect">
             <a:avLst>
@@ -6257,22 +5838,22 @@
               </a:rPr>
               <a:t>PIC</a:t>
             </a:r>
-            <a:endParaRPr b="0" lang="ru-RU" sz="1800" spc="-1" strike="noStrike">
-              <a:latin typeface="Arial"/>
-            </a:endParaRPr>
-          </a:p>
-        </p:txBody>
-      </p:sp>
-      <p:sp>
-        <p:nvSpPr>
-          <p:cNvPr id="91" name="TextBox 10"/>
+            <a:endParaRPr b="0" lang="en-US" sz="1800" spc="-1" strike="noStrike">
+              <a:latin typeface="Arial"/>
+            </a:endParaRPr>
+          </a:p>
+        </p:txBody>
+      </p:sp>
+      <p:sp>
+        <p:nvSpPr>
+          <p:cNvPr id="90" name="TextBox 10"/>
           <p:cNvSpPr/>
           <p:nvPr/>
         </p:nvSpPr>
         <p:spPr>
           <a:xfrm>
             <a:off x="6329520" y="3013560"/>
-            <a:ext cx="2429280" cy="713880"/>
+            <a:ext cx="2428920" cy="713520"/>
           </a:xfrm>
           <a:prstGeom prst="rect">
             <a:avLst/>
@@ -6319,22 +5900,22 @@
               </a:rPr>
               <a:t>3</a:t>
             </a:r>
-            <a:endParaRPr b="0" lang="ru-RU" sz="1400" spc="-1" strike="noStrike">
-              <a:latin typeface="Arial"/>
-            </a:endParaRPr>
-          </a:p>
-        </p:txBody>
-      </p:sp>
-      <p:sp>
-        <p:nvSpPr>
-          <p:cNvPr id="92" name="TextBox 10"/>
+            <a:endParaRPr b="0" lang="en-US" sz="1400" spc="-1" strike="noStrike">
+              <a:latin typeface="Arial"/>
+            </a:endParaRPr>
+          </a:p>
+        </p:txBody>
+      </p:sp>
+      <p:sp>
+        <p:nvSpPr>
+          <p:cNvPr id="91" name="TextBox 10"/>
           <p:cNvSpPr/>
           <p:nvPr/>
         </p:nvSpPr>
         <p:spPr>
           <a:xfrm>
             <a:off x="6329520" y="3798000"/>
-            <a:ext cx="2429280" cy="1037880"/>
+            <a:ext cx="2428920" cy="1037520"/>
           </a:xfrm>
           <a:prstGeom prst="rect">
             <a:avLst/>
@@ -6381,22 +5962,22 @@
               </a:rPr>
               <a:t>3</a:t>
             </a:r>
-            <a:endParaRPr b="0" lang="ru-RU" sz="1100" spc="-1" strike="noStrike">
-              <a:latin typeface="Arial"/>
-            </a:endParaRPr>
-          </a:p>
-        </p:txBody>
-      </p:sp>
-      <p:sp>
-        <p:nvSpPr>
-          <p:cNvPr id="93" name="Прямоугольник: скругленные углы 19"/>
+            <a:endParaRPr b="0" lang="en-US" sz="1100" spc="-1" strike="noStrike">
+              <a:latin typeface="Arial"/>
+            </a:endParaRPr>
+          </a:p>
+        </p:txBody>
+      </p:sp>
+      <p:sp>
+        <p:nvSpPr>
+          <p:cNvPr id="92" name="Прямоугольник: скругленные углы 19"/>
           <p:cNvSpPr/>
           <p:nvPr/>
         </p:nvSpPr>
         <p:spPr>
           <a:xfrm>
             <a:off x="6273000" y="1252800"/>
-            <a:ext cx="2557080" cy="3642840"/>
+            <a:ext cx="2556720" cy="3642480"/>
           </a:xfrm>
           <a:prstGeom prst="roundRect">
             <a:avLst>
@@ -6464,14 +6045,14 @@
       </p:grpSpPr>
       <p:sp>
         <p:nvSpPr>
-          <p:cNvPr id="94" name="Прямоугольник со скругленными углами 3"/>
+          <p:cNvPr id="93" name="Прямоугольник со скругленными углами 3"/>
           <p:cNvSpPr/>
           <p:nvPr/>
         </p:nvSpPr>
         <p:spPr>
           <a:xfrm>
             <a:off x="0" y="0"/>
-            <a:ext cx="3396960" cy="5143320"/>
+            <a:ext cx="3396600" cy="5142960"/>
           </a:xfrm>
           <a:prstGeom prst="roundRect">
             <a:avLst>
@@ -6522,22 +6103,22 @@
               </a:rPr>
               <a:t>PIC</a:t>
             </a:r>
-            <a:endParaRPr b="0" lang="ru-RU" sz="1800" spc="-1" strike="noStrike">
-              <a:latin typeface="Arial"/>
-            </a:endParaRPr>
-          </a:p>
-        </p:txBody>
-      </p:sp>
-      <p:sp>
-        <p:nvSpPr>
-          <p:cNvPr id="95" name="TextBox 10"/>
+            <a:endParaRPr b="0" lang="en-US" sz="1800" spc="-1" strike="noStrike">
+              <a:latin typeface="Arial"/>
+            </a:endParaRPr>
+          </a:p>
+        </p:txBody>
+      </p:sp>
+      <p:sp>
+        <p:nvSpPr>
+          <p:cNvPr id="94" name="TextBox 10"/>
           <p:cNvSpPr/>
           <p:nvPr/>
         </p:nvSpPr>
         <p:spPr>
           <a:xfrm>
             <a:off x="4192560" y="3830040"/>
-            <a:ext cx="4672440" cy="329040"/>
+            <a:ext cx="4672080" cy="328680"/>
           </a:xfrm>
           <a:prstGeom prst="rect">
             <a:avLst/>
@@ -6574,22 +6155,22 @@
               </a:rPr>
               <a:t>SUBTITLE3</a:t>
             </a:r>
-            <a:endParaRPr b="0" lang="ru-RU" sz="1400" spc="-1" strike="noStrike">
-              <a:latin typeface="Arial"/>
-            </a:endParaRPr>
-          </a:p>
-        </p:txBody>
-      </p:sp>
-      <p:sp>
-        <p:nvSpPr>
-          <p:cNvPr id="96" name="TextBox 10"/>
+            <a:endParaRPr b="0" lang="en-US" sz="1400" spc="-1" strike="noStrike">
+              <a:latin typeface="Arial"/>
+            </a:endParaRPr>
+          </a:p>
+        </p:txBody>
+      </p:sp>
+      <p:sp>
+        <p:nvSpPr>
+          <p:cNvPr id="95" name="TextBox 10"/>
           <p:cNvSpPr/>
           <p:nvPr/>
         </p:nvSpPr>
         <p:spPr>
           <a:xfrm>
             <a:off x="4192560" y="4188600"/>
-            <a:ext cx="4672440" cy="713880"/>
+            <a:ext cx="4672080" cy="713520"/>
           </a:xfrm>
           <a:prstGeom prst="rect">
             <a:avLst/>
@@ -6636,22 +6217,22 @@
               </a:rPr>
               <a:t>3</a:t>
             </a:r>
-            <a:endParaRPr b="0" lang="ru-RU" sz="1100" spc="-1" strike="noStrike">
-              <a:latin typeface="Arial"/>
-            </a:endParaRPr>
-          </a:p>
-        </p:txBody>
-      </p:sp>
-      <p:sp>
-        <p:nvSpPr>
-          <p:cNvPr id="97" name="Овал 9"/>
+            <a:endParaRPr b="0" lang="en-US" sz="1100" spc="-1" strike="noStrike">
+              <a:latin typeface="Arial"/>
+            </a:endParaRPr>
+          </a:p>
+        </p:txBody>
+      </p:sp>
+      <p:sp>
+        <p:nvSpPr>
+          <p:cNvPr id="96" name="Овал 9"/>
           <p:cNvSpPr/>
           <p:nvPr/>
         </p:nvSpPr>
         <p:spPr>
           <a:xfrm>
             <a:off x="3724560" y="3830040"/>
-            <a:ext cx="403200" cy="403200"/>
+            <a:ext cx="402840" cy="402840"/>
           </a:xfrm>
           <a:prstGeom prst="ellipse">
             <a:avLst/>
@@ -6694,25 +6275,26 @@
                   <a:srgbClr val="ffffff"/>
                 </a:solidFill>
                 <a:latin typeface="Calibri"/>
+                <a:ea typeface="DejaVu Sans"/>
               </a:rPr>
               <a:t>03</a:t>
             </a:r>
-            <a:endParaRPr b="0" lang="ru-RU" sz="800" spc="-1" strike="noStrike">
-              <a:latin typeface="Arial"/>
-            </a:endParaRPr>
-          </a:p>
-        </p:txBody>
-      </p:sp>
-      <p:sp>
-        <p:nvSpPr>
-          <p:cNvPr id="98" name="TextBox 10"/>
+            <a:endParaRPr b="0" lang="en-US" sz="800" spc="-1" strike="noStrike">
+              <a:latin typeface="Arial"/>
+            </a:endParaRPr>
+          </a:p>
+        </p:txBody>
+      </p:sp>
+      <p:sp>
+        <p:nvSpPr>
+          <p:cNvPr id="97" name="TextBox 10"/>
           <p:cNvSpPr/>
           <p:nvPr/>
         </p:nvSpPr>
         <p:spPr>
           <a:xfrm>
             <a:off x="4192560" y="2571840"/>
-            <a:ext cx="4672440" cy="329040"/>
+            <a:ext cx="4672080" cy="328680"/>
           </a:xfrm>
           <a:prstGeom prst="rect">
             <a:avLst/>
@@ -6759,22 +6341,22 @@
               </a:rPr>
               <a:t>2</a:t>
             </a:r>
-            <a:endParaRPr b="0" lang="ru-RU" sz="1400" spc="-1" strike="noStrike">
-              <a:latin typeface="Arial"/>
-            </a:endParaRPr>
-          </a:p>
-        </p:txBody>
-      </p:sp>
-      <p:sp>
-        <p:nvSpPr>
-          <p:cNvPr id="99" name="TextBox 10"/>
+            <a:endParaRPr b="0" lang="en-US" sz="1400" spc="-1" strike="noStrike">
+              <a:latin typeface="Arial"/>
+            </a:endParaRPr>
+          </a:p>
+        </p:txBody>
+      </p:sp>
+      <p:sp>
+        <p:nvSpPr>
+          <p:cNvPr id="98" name="TextBox 10"/>
           <p:cNvSpPr/>
           <p:nvPr/>
         </p:nvSpPr>
         <p:spPr>
           <a:xfrm>
             <a:off x="4192560" y="2930400"/>
-            <a:ext cx="4672440" cy="713880"/>
+            <a:ext cx="4672080" cy="713520"/>
           </a:xfrm>
           <a:prstGeom prst="rect">
             <a:avLst/>
@@ -6821,22 +6403,22 @@
               </a:rPr>
               <a:t>2</a:t>
             </a:r>
-            <a:endParaRPr b="0" lang="ru-RU" sz="1100" spc="-1" strike="noStrike">
-              <a:latin typeface="Arial"/>
-            </a:endParaRPr>
-          </a:p>
-        </p:txBody>
-      </p:sp>
-      <p:sp>
-        <p:nvSpPr>
-          <p:cNvPr id="100" name="Овал 13"/>
+            <a:endParaRPr b="0" lang="en-US" sz="1100" spc="-1" strike="noStrike">
+              <a:latin typeface="Arial"/>
+            </a:endParaRPr>
+          </a:p>
+        </p:txBody>
+      </p:sp>
+      <p:sp>
+        <p:nvSpPr>
+          <p:cNvPr id="99" name="Овал 13"/>
           <p:cNvSpPr/>
           <p:nvPr/>
         </p:nvSpPr>
         <p:spPr>
           <a:xfrm>
             <a:off x="3724560" y="2571840"/>
-            <a:ext cx="403200" cy="403200"/>
+            <a:ext cx="402840" cy="402840"/>
           </a:xfrm>
           <a:prstGeom prst="ellipse">
             <a:avLst/>
@@ -6879,25 +6461,26 @@
                   <a:srgbClr val="ffffff"/>
                 </a:solidFill>
                 <a:latin typeface="Calibri"/>
+                <a:ea typeface="DejaVu Sans"/>
               </a:rPr>
               <a:t>02</a:t>
             </a:r>
-            <a:endParaRPr b="0" lang="ru-RU" sz="800" spc="-1" strike="noStrike">
-              <a:latin typeface="Arial"/>
-            </a:endParaRPr>
-          </a:p>
-        </p:txBody>
-      </p:sp>
-      <p:sp>
-        <p:nvSpPr>
-          <p:cNvPr id="101" name="TextBox 10"/>
+            <a:endParaRPr b="0" lang="en-US" sz="800" spc="-1" strike="noStrike">
+              <a:latin typeface="Arial"/>
+            </a:endParaRPr>
+          </a:p>
+        </p:txBody>
+      </p:sp>
+      <p:sp>
+        <p:nvSpPr>
+          <p:cNvPr id="100" name="TextBox 10"/>
           <p:cNvSpPr/>
           <p:nvPr/>
         </p:nvSpPr>
         <p:spPr>
           <a:xfrm>
             <a:off x="4192560" y="1311840"/>
-            <a:ext cx="4672440" cy="329040"/>
+            <a:ext cx="4672080" cy="328680"/>
           </a:xfrm>
           <a:prstGeom prst="rect">
             <a:avLst/>
@@ -6944,22 +6527,22 @@
               </a:rPr>
               <a:t>1</a:t>
             </a:r>
-            <a:endParaRPr b="0" lang="ru-RU" sz="1400" spc="-1" strike="noStrike">
-              <a:latin typeface="Arial"/>
-            </a:endParaRPr>
-          </a:p>
-        </p:txBody>
-      </p:sp>
-      <p:sp>
-        <p:nvSpPr>
-          <p:cNvPr id="102" name="TextBox 10"/>
+            <a:endParaRPr b="0" lang="en-US" sz="1400" spc="-1" strike="noStrike">
+              <a:latin typeface="Arial"/>
+            </a:endParaRPr>
+          </a:p>
+        </p:txBody>
+      </p:sp>
+      <p:sp>
+        <p:nvSpPr>
+          <p:cNvPr id="101" name="TextBox 10"/>
           <p:cNvSpPr/>
           <p:nvPr/>
         </p:nvSpPr>
         <p:spPr>
           <a:xfrm>
             <a:off x="4192560" y="1670760"/>
-            <a:ext cx="4672440" cy="713880"/>
+            <a:ext cx="4672080" cy="713520"/>
           </a:xfrm>
           <a:prstGeom prst="rect">
             <a:avLst/>
@@ -7006,22 +6589,22 @@
               </a:rPr>
               <a:t>1</a:t>
             </a:r>
-            <a:endParaRPr b="0" lang="ru-RU" sz="1100" spc="-1" strike="noStrike">
-              <a:latin typeface="Arial"/>
-            </a:endParaRPr>
-          </a:p>
-        </p:txBody>
-      </p:sp>
-      <p:sp>
-        <p:nvSpPr>
-          <p:cNvPr id="103" name="Овал 16"/>
+            <a:endParaRPr b="0" lang="en-US" sz="1100" spc="-1" strike="noStrike">
+              <a:latin typeface="Arial"/>
+            </a:endParaRPr>
+          </a:p>
+        </p:txBody>
+      </p:sp>
+      <p:sp>
+        <p:nvSpPr>
+          <p:cNvPr id="102" name="Овал 16"/>
           <p:cNvSpPr/>
           <p:nvPr/>
         </p:nvSpPr>
         <p:spPr>
           <a:xfrm>
             <a:off x="3724560" y="1311840"/>
-            <a:ext cx="403200" cy="403200"/>
+            <a:ext cx="402840" cy="402840"/>
           </a:xfrm>
           <a:prstGeom prst="ellipse">
             <a:avLst/>
@@ -7064,25 +6647,26 @@
                   <a:srgbClr val="ffffff"/>
                 </a:solidFill>
                 <a:latin typeface="Calibri"/>
+                <a:ea typeface="DejaVu Sans"/>
               </a:rPr>
               <a:t>01</a:t>
             </a:r>
-            <a:endParaRPr b="0" lang="ru-RU" sz="800" spc="-1" strike="noStrike">
-              <a:latin typeface="Arial"/>
-            </a:endParaRPr>
-          </a:p>
-        </p:txBody>
-      </p:sp>
-      <p:sp>
-        <p:nvSpPr>
-          <p:cNvPr id="104" name="TextBox 17"/>
+            <a:endParaRPr b="0" lang="en-US" sz="800" spc="-1" strike="noStrike">
+              <a:latin typeface="Arial"/>
+            </a:endParaRPr>
+          </a:p>
+        </p:txBody>
+      </p:sp>
+      <p:sp>
+        <p:nvSpPr>
+          <p:cNvPr id="103" name="TextBox 17"/>
           <p:cNvSpPr/>
           <p:nvPr/>
         </p:nvSpPr>
         <p:spPr>
           <a:xfrm>
             <a:off x="3607560" y="215280"/>
-            <a:ext cx="5375160" cy="909720"/>
+            <a:ext cx="5374800" cy="909360"/>
           </a:xfrm>
           <a:prstGeom prst="rect">
             <a:avLst/>
@@ -7115,10 +6699,11 @@
                   <a:srgbClr val="ffffff"/>
                 </a:solidFill>
                 <a:latin typeface="Arial"/>
+                <a:ea typeface="DejaVu Sans"/>
               </a:rPr>
               <a:t>TITLE</a:t>
             </a:r>
-            <a:endParaRPr b="0" lang="ru-RU" sz="2200" spc="-1" strike="noStrike">
+            <a:endParaRPr b="0" lang="en-US" sz="2200" spc="-1" strike="noStrike">
               <a:latin typeface="Arial"/>
             </a:endParaRPr>
           </a:p>
@@ -7163,14 +6748,14 @@
       </p:grpSpPr>
       <p:sp>
         <p:nvSpPr>
-          <p:cNvPr id="105" name="Прямоугольник со скругленными углами 3"/>
+          <p:cNvPr id="104" name="Прямоугольник со скругленными углами 3"/>
           <p:cNvSpPr/>
           <p:nvPr/>
         </p:nvSpPr>
         <p:spPr>
           <a:xfrm>
             <a:off x="186840" y="185400"/>
-            <a:ext cx="8770320" cy="4758120"/>
+            <a:ext cx="8769960" cy="4757760"/>
           </a:xfrm>
           <a:prstGeom prst="roundRect">
             <a:avLst>
@@ -7201,14 +6786,14 @@
       </p:sp>
       <p:sp>
         <p:nvSpPr>
-          <p:cNvPr id="106" name="Прямоугольник 10"/>
+          <p:cNvPr id="105" name="Прямоугольник 10"/>
           <p:cNvSpPr/>
           <p:nvPr/>
         </p:nvSpPr>
         <p:spPr>
           <a:xfrm>
             <a:off x="460080" y="658080"/>
-            <a:ext cx="8469000" cy="3306960"/>
+            <a:ext cx="8468640" cy="3306600"/>
           </a:xfrm>
           <a:prstGeom prst="rect">
             <a:avLst/>
@@ -7245,7 +6830,7 @@
               </a:rPr>
               <a:t>TITLE</a:t>
             </a:r>
-            <a:endParaRPr b="0" lang="ru-RU" sz="5400" spc="-1" strike="noStrike">
+            <a:endParaRPr b="0" lang="en-US" sz="5400" spc="-1" strike="noStrike">
               <a:latin typeface="Arial"/>
             </a:endParaRPr>
           </a:p>
